--- a/slides/02-sessions-worktrees-context.pptx
+++ b/slides/02-sessions-worktrees-context.pptx
@@ -823,179 +823,179 @@
 </file>
 
 <file path=ppt/notesSlides/notesSlide13.xml><?xml version="1.0" encoding="utf-8"?>
-<p:notes xmlns:a="http://schemas.openxmlformats.org/drawingml/2006/main" xmlns:r="http://schemas.openxmlformats.org/officeDocument/2006/relationships" xmlns:p="http://schemas.openxmlformats.org/presentationml/2006/main">
-  <p:cSld>
-    <p:spTree>
-      <p:nvGrpSpPr>
-        <p:cNvPr id="1" name=""/>
-        <p:cNvGrpSpPr/>
-        <p:nvPr/>
-      </p:nvGrpSpPr>
-      <p:grpSpPr>
-        <a:xfrm>
-          <a:off x="0" y="0"/>
-          <a:ext cx="0" cy="0"/>
-          <a:chOff x="0" y="0"/>
-          <a:chExt cx="0" cy="0"/>
-        </a:xfrm>
-      </p:grpSpPr>
-      <p:sp>
-        <p:nvSpPr>
-          <p:cNvPr id="2" name="Slide Image Placeholder 1"/>
-          <p:cNvSpPr>
-            <a:spLocks noGrp="1" noRot="1" noChangeAspect="1"/>
-          </p:cNvSpPr>
-          <p:nvPr>
-            <p:ph type="sldImg"/>
-          </p:nvPr>
-        </p:nvSpPr>
-        <p:spPr/>
-      </p:sp>
-      <p:sp>
-        <p:nvSpPr>
-          <p:cNvPr id="3" name="Notes Placeholder 2"/>
-          <p:cNvSpPr>
-            <a:spLocks noGrp="1"/>
-          </p:cNvSpPr>
-          <p:nvPr>
-            <p:ph type="body" idx="1"/>
-          </p:nvPr>
-        </p:nvSpPr>
-        <p:spPr/>
-        <p:txBody>
-          <a:bodyPr/>
-          <a:lstStyle/>
-          <a:p>
-            <a:r>
-              <a:rPr lang="en-US" dirty="0"/>
-              <a:t>Run chronicle standup. It reports your work from the last day, including this session and its changes. Then run context and expand the Context bar. You see the working and base branch, Remote control, path, project, session name and ID, and changes. Tokens shows how much the session sent and received. Context shows how the window divides among the system prompt, system tools, MCP tools, messages, free space, and buffer. Session spend shows AI credits. Context works only after at least one prompt. Check context before you add more to a busy session. This practice branch has an intentional regression and main is already correct, so there is no pull request. Ask Copilot to stop the dev server.</a:t>
-            </a:r>
-            <a:endParaRPr lang="en-US" dirty="0"/>
-          </a:p>
-        </p:txBody>
-      </p:sp>
-      <p:sp>
-        <p:nvSpPr>
-          <p:cNvPr id="4" name="Slide Number Placeholder 3"/>
-          <p:cNvSpPr>
-            <a:spLocks noGrp="1"/>
-          </p:cNvSpPr>
-          <p:nvPr>
-            <p:ph type="sldNum" sz="quarter" idx="10"/>
-          </p:nvPr>
-        </p:nvSpPr>
-        <p:spPr/>
-        <p:txBody>
-          <a:bodyPr/>
-          <a:lstStyle/>
-          <a:p>
-            <a:fld id="{F7021451-1387-4CA6-816F-3879F97B5CBC}" type="slidenum">
-              <a:rPr lang="en-US"/>
-              <a:t>13</a:t>
-            </a:fld>
-            <a:endParaRPr lang="en-US"/>
-          </a:p>
-        </p:txBody>
-      </p:sp>
-    </p:spTree>
-    <p:extLst>
-      <p:ext uri="{BB962C8B-B14F-4D97-AF65-F5344CB8AC3E}">
-        <p14:creationId xmlns:p14="http://schemas.microsoft.com/office/powerpoint/2010/main" val="1024086991"/>
-      </p:ext>
-    </p:extLst>
-  </p:cSld>
-  <p:clrMapOvr>
-    <a:masterClrMapping/>
-  </p:clrMapOvr>
-</p:notes>
+<ns0:notes xmlns:ns0="http://schemas.openxmlformats.org/presentationml/2006/main" xmlns:ns1="http://schemas.openxmlformats.org/drawingml/2006/main" xmlns:ns2="http://schemas.microsoft.com/office/powerpoint/2010/main">
+  <ns0:cSld>
+    <ns0:spTree>
+      <ns0:nvGrpSpPr>
+        <ns0:cNvPr id="1" name=""/>
+        <ns0:cNvGrpSpPr/>
+        <ns0:nvPr/>
+      </ns0:nvGrpSpPr>
+      <ns0:grpSpPr>
+        <ns1:xfrm>
+          <ns1:off x="0" y="0"/>
+          <ns1:ext cx="0" cy="0"/>
+          <ns1:chOff x="0" y="0"/>
+          <ns1:chExt cx="0" cy="0"/>
+        </ns1:xfrm>
+      </ns0:grpSpPr>
+      <ns0:sp>
+        <ns0:nvSpPr>
+          <ns0:cNvPr id="2" name="Slide Image Placeholder 1"/>
+          <ns0:cNvSpPr>
+            <ns1:spLocks noGrp="1" noRot="1" noChangeAspect="1"/>
+          </ns0:cNvSpPr>
+          <ns0:nvPr>
+            <ns0:ph type="sldImg"/>
+          </ns0:nvPr>
+        </ns0:nvSpPr>
+        <ns0:spPr/>
+      </ns0:sp>
+      <ns0:sp>
+        <ns0:nvSpPr>
+          <ns0:cNvPr id="3" name="Notes Placeholder 2"/>
+          <ns0:cNvSpPr>
+            <ns1:spLocks noGrp="1"/>
+          </ns0:cNvSpPr>
+          <ns0:nvPr>
+            <ns0:ph type="body" idx="1"/>
+          </ns0:nvPr>
+        </ns0:nvSpPr>
+        <ns0:spPr/>
+        <ns0:txBody>
+          <ns1:bodyPr/>
+          <ns1:lstStyle/>
+          <ns1:p>
+            <ns1:r>
+              <ns1:rPr lang="en-US" dirty="0"/>
+              <ns1:t>Run chronicle standup to review your recent work. Then run /context. It opens the usage popup below the prompt box. Expand Context to see how the current context window is used. The popup also shows plan usage, session AI credits, and token totals. The session's working branch, base branch, Remote control, path, project, name, and ID are available by selecting the session name at the top of the app. /context does not show those session details. Use it after at least one prompt, and check it before adding more context to a busy session. This practice branch has an intentional regression and main is already correct, so there is no pull request. Ask Copilot to stop the dev server.</ns1:t>
+            </ns1:r>
+            <ns1:endParaRPr lang="en-US" dirty="0"/>
+          </ns1:p>
+        </ns0:txBody>
+      </ns0:sp>
+      <ns0:sp>
+        <ns0:nvSpPr>
+          <ns0:cNvPr id="4" name="Slide Number Placeholder 3"/>
+          <ns0:cNvSpPr>
+            <ns1:spLocks noGrp="1"/>
+          </ns0:cNvSpPr>
+          <ns0:nvPr>
+            <ns0:ph type="sldNum" sz="quarter" idx="10"/>
+          </ns0:nvPr>
+        </ns0:nvSpPr>
+        <ns0:spPr/>
+        <ns0:txBody>
+          <ns1:bodyPr/>
+          <ns1:lstStyle/>
+          <ns1:p>
+            <ns1:fld id="{F7021451-1387-4CA6-816F-3879F97B5CBC}" type="slidenum">
+              <ns1:rPr lang="en-US"/>
+              <ns1:t>13</ns1:t>
+            </ns1:fld>
+            <ns1:endParaRPr lang="en-US"/>
+          </ns1:p>
+        </ns0:txBody>
+      </ns0:sp>
+    </ns0:spTree>
+    <ns0:extLst>
+      <ns0:ext uri="{BB962C8B-B14F-4D97-AF65-F5344CB8AC3E}">
+        <ns2:creationId val="1024086991"/>
+      </ns0:ext>
+    </ns0:extLst>
+  </ns0:cSld>
+  <ns0:clrMapOvr>
+    <ns1:masterClrMapping/>
+  </ns0:clrMapOvr>
+</ns0:notes>
 </file>
 
 <file path=ppt/notesSlides/notesSlide14.xml><?xml version="1.0" encoding="utf-8"?>
-<p:notes xmlns:a="http://schemas.openxmlformats.org/drawingml/2006/main" xmlns:r="http://schemas.openxmlformats.org/officeDocument/2006/relationships" xmlns:p="http://schemas.openxmlformats.org/presentationml/2006/main">
-  <p:cSld>
-    <p:spTree>
-      <p:nvGrpSpPr>
-        <p:cNvPr id="1" name=""/>
-        <p:cNvGrpSpPr/>
-        <p:nvPr/>
-      </p:nvGrpSpPr>
-      <p:grpSpPr>
-        <a:xfrm>
-          <a:off x="0" y="0"/>
-          <a:ext cx="0" cy="0"/>
-          <a:chOff x="0" y="0"/>
-          <a:chExt cx="0" cy="0"/>
-        </a:xfrm>
-      </p:grpSpPr>
-      <p:sp>
-        <p:nvSpPr>
-          <p:cNvPr id="2" name="Slide Image Placeholder 1"/>
-          <p:cNvSpPr>
-            <a:spLocks noGrp="1" noRot="1" noChangeAspect="1"/>
-          </p:cNvSpPr>
-          <p:nvPr>
-            <p:ph type="sldImg"/>
-          </p:nvPr>
-        </p:nvSpPr>
-        <p:spPr/>
-      </p:sp>
-      <p:sp>
-        <p:nvSpPr>
-          <p:cNvPr id="3" name="Notes Placeholder 2"/>
-          <p:cNvSpPr>
-            <a:spLocks noGrp="1"/>
-          </p:cNvSpPr>
-          <p:nvPr>
-            <p:ph type="body" idx="1"/>
-          </p:nvPr>
-        </p:nvSpPr>
-        <p:spPr/>
-        <p:txBody>
-          <a:bodyPr/>
-          <a:lstStyle/>
-          <a:p>
-            <a:r>
-              <a:rPr lang="en-US" dirty="0"/>
-              <a:t>The assignment repeats the workflow with a new feature: a light and dark theme toggle. Start a new worktree session from main and check its details with context. Preview the app and confirm it only has a light theme. In Plan mode, attach samples/book-app-web/src with the at sign and ask for a small plan. Implement, inspect the diff, and try hobbit and zzzz-no-match in both themes. Run the tests and build, compare the chronicle standup with what you saw, and stop the dev server.</a:t>
-            </a:r>
-            <a:endParaRPr lang="en-US" dirty="0"/>
-          </a:p>
-        </p:txBody>
-      </p:sp>
-      <p:sp>
-        <p:nvSpPr>
-          <p:cNvPr id="4" name="Slide Number Placeholder 3"/>
-          <p:cNvSpPr>
-            <a:spLocks noGrp="1"/>
-          </p:cNvSpPr>
-          <p:nvPr>
-            <p:ph type="sldNum" sz="quarter" idx="10"/>
-          </p:nvPr>
-        </p:nvSpPr>
-        <p:spPr/>
-        <p:txBody>
-          <a:bodyPr/>
-          <a:lstStyle/>
-          <a:p>
-            <a:fld id="{F7021451-1387-4CA6-816F-3879F97B5CBC}" type="slidenum">
-              <a:rPr lang="en-US"/>
-              <a:t>14</a:t>
-            </a:fld>
-            <a:endParaRPr lang="en-US"/>
-          </a:p>
-        </p:txBody>
-      </p:sp>
-    </p:spTree>
-    <p:extLst>
-      <p:ext uri="{BB962C8B-B14F-4D97-AF65-F5344CB8AC3E}">
-        <p14:creationId xmlns:p14="http://schemas.microsoft.com/office/powerpoint/2010/main" val="1024086991"/>
-      </p:ext>
-    </p:extLst>
-  </p:cSld>
-  <p:clrMapOvr>
-    <a:masterClrMapping/>
-  </p:clrMapOvr>
-</p:notes>
+<ns0:notes xmlns:ns0="http://schemas.openxmlformats.org/presentationml/2006/main" xmlns:ns1="http://schemas.openxmlformats.org/drawingml/2006/main" xmlns:ns2="http://schemas.microsoft.com/office/powerpoint/2010/main">
+  <ns0:cSld>
+    <ns0:spTree>
+      <ns0:nvGrpSpPr>
+        <ns0:cNvPr id="1" name=""/>
+        <ns0:cNvGrpSpPr/>
+        <ns0:nvPr/>
+      </ns0:nvGrpSpPr>
+      <ns0:grpSpPr>
+        <ns1:xfrm>
+          <ns1:off x="0" y="0"/>
+          <ns1:ext cx="0" cy="0"/>
+          <ns1:chOff x="0" y="0"/>
+          <ns1:chExt cx="0" cy="0"/>
+        </ns1:xfrm>
+      </ns0:grpSpPr>
+      <ns0:sp>
+        <ns0:nvSpPr>
+          <ns0:cNvPr id="2" name="Slide Image Placeholder 1"/>
+          <ns0:cNvSpPr>
+            <ns1:spLocks noGrp="1" noRot="1" noChangeAspect="1"/>
+          </ns0:cNvSpPr>
+          <ns0:nvPr>
+            <ns0:ph type="sldImg"/>
+          </ns0:nvPr>
+        </ns0:nvSpPr>
+        <ns0:spPr/>
+      </ns0:sp>
+      <ns0:sp>
+        <ns0:nvSpPr>
+          <ns0:cNvPr id="3" name="Notes Placeholder 2"/>
+          <ns0:cNvSpPr>
+            <ns1:spLocks noGrp="1"/>
+          </ns0:cNvSpPr>
+          <ns0:nvPr>
+            <ns0:ph type="body" idx="1"/>
+          </ns0:nvPr>
+        </ns0:nvSpPr>
+        <ns0:spPr/>
+        <ns0:txBody>
+          <ns1:bodyPr/>
+          <ns1:lstStyle/>
+          <ns1:p>
+            <ns1:r>
+              <ns1:rPr lang="en-US" dirty="0"/>
+              <ns1:t>The assignment repeats the workflow with a new feature: a light and dark theme toggle. Start a new worktree session from main and inspect the session name and /context usage popup. Preview the app and confirm it only has a light theme. In Plan mode, attach samples/book-app-web/src with the at sign and ask for a small plan. Implement, inspect the diff, and try hobbit and zzzz-no-match in both themes. Run the tests and build, compare the chronicle standup with what you saw, and stop the dev server.</ns1:t>
+            </ns1:r>
+            <ns1:endParaRPr lang="en-US" dirty="0"/>
+          </ns1:p>
+        </ns0:txBody>
+      </ns0:sp>
+      <ns0:sp>
+        <ns0:nvSpPr>
+          <ns0:cNvPr id="4" name="Slide Number Placeholder 3"/>
+          <ns0:cNvSpPr>
+            <ns1:spLocks noGrp="1"/>
+          </ns0:cNvSpPr>
+          <ns0:nvPr>
+            <ns0:ph type="sldNum" sz="quarter" idx="10"/>
+          </ns0:nvPr>
+        </ns0:nvSpPr>
+        <ns0:spPr/>
+        <ns0:txBody>
+          <ns1:bodyPr/>
+          <ns1:lstStyle/>
+          <ns1:p>
+            <ns1:fld id="{F7021451-1387-4CA6-816F-3879F97B5CBC}" type="slidenum">
+              <ns1:rPr lang="en-US"/>
+              <ns1:t>14</ns1:t>
+            </ns1:fld>
+            <ns1:endParaRPr lang="en-US"/>
+          </ns1:p>
+        </ns0:txBody>
+      </ns0:sp>
+    </ns0:spTree>
+    <ns0:extLst>
+      <ns0:ext uri="{BB962C8B-B14F-4D97-AF65-F5344CB8AC3E}">
+        <ns2:creationId val="1024086991"/>
+      </ns0:ext>
+    </ns0:extLst>
+  </ns0:cSld>
+  <ns0:clrMapOvr>
+    <ns1:masterClrMapping/>
+  </ns0:clrMapOvr>
+</ns0:notes>
 </file>
 
 <file path=ppt/notesSlides/notesSlide15.xml><?xml version="1.0" encoding="utf-8"?>
@@ -3787,7 +3787,7 @@
       </p:sp>
       <p:pic>
         <p:nvPicPr>
-          <p:cNvPr id="22" name="Image 2" descr="Review plan box with the options Approve and implement this plan, Exit plan mode and I will prompt myself, and Suggest changes to the plan, next to the plan in the Plan tab">    </p:cNvPr>
+          <p:cNvPr id="22" name="Image 2" descr="Review plan box with the options Approve and implement this plan, Exit plan mode and I will prompt myself, and Suggest changes to the plan, next to the plan in the Plan tab"/>
           <p:cNvPicPr>
             <a:picLocks noChangeAspect="1"/>
           </p:cNvPicPr>
@@ -4181,7 +4181,7 @@
       </p:sp>
       <p:pic>
         <p:nvPicPr>
-          <p:cNvPr id="11" name="Image 2" descr="Book App preview in the browser tab with the search zzzz-no-match, 0 books shown, and the empty state No results, Try again">    </p:cNvPr>
+          <p:cNvPr id="11" name="Image 2" descr="Book App preview in the browser tab with the search zzzz-no-match, 0 books shown, and the empty state No results, Try again"/>
           <p:cNvPicPr>
             <a:picLocks noChangeAspect="1"/>
           </p:cNvPicPr>
@@ -4745,1886 +4745,1886 @@
 </file>
 
 <file path=ppt/slides/slide13.xml><?xml version="1.0" encoding="utf-8"?>
-<p:sld xmlns:a="http://schemas.openxmlformats.org/drawingml/2006/main" xmlns:r="http://schemas.openxmlformats.org/officeDocument/2006/relationships" xmlns:p="http://schemas.openxmlformats.org/presentationml/2006/main">
-  <p:cSld name="Slide 13">
-    <p:bg>
-      <p:bgPr>
-        <a:solidFill>
-          <a:srgbClr val="FFFFFF"/>
-        </a:solidFill>
-      </p:bgPr>
-    </p:bg>
-    <p:spTree>
-      <p:nvGrpSpPr>
-        <p:cNvPr id="1" name=""/>
-        <p:cNvGrpSpPr/>
-        <p:nvPr/>
-      </p:nvGrpSpPr>
-      <p:grpSpPr>
-        <a:xfrm>
-          <a:off x="0" y="0"/>
-          <a:ext cx="0" cy="0"/>
-          <a:chOff x="0" y="0"/>
-          <a:chExt cx="0" cy="0"/>
-        </a:xfrm>
-      </p:grpSpPr>
-      <p:pic>
-        <p:nvPicPr>
-          <p:cNvPr id="2" name="Image 0" descr="">
-            <a:extLst>
-              <a:ext uri="{C183D7F6-B498-43B3-948B-1728B52AA6E4}">
-                <adec:decorative xmlns:adec="http://schemas.microsoft.com/office/drawing/2017/decorative" val="1"/>
-              </a:ext>
-            </a:extLst>
-          </p:cNvPr>
-          <p:cNvPicPr>
-            <a:picLocks noChangeAspect="1"/>
-          </p:cNvPicPr>
-          <p:nvPr/>
-        </p:nvPicPr>
-        <p:blipFill>
-          <a:blip r:embed="rId1"/>
-          <a:stretch>
-            <a:fillRect/>
-          </a:stretch>
-        </p:blipFill>
-        <p:spPr>
-          <a:xfrm>
-            <a:off x="6349901" y="0"/>
-            <a:ext cx="2793950" cy="1308050"/>
-          </a:xfrm>
-          <a:prstGeom prst="rect">
-            <a:avLst/>
-          </a:prstGeom>
-        </p:spPr>
-      </p:pic>
-      <p:sp>
-        <p:nvSpPr>
-          <p:cNvPr id="3" name="Text 0"/>
-          <p:cNvSpPr/>
-          <p:nvPr/>
-        </p:nvSpPr>
-        <p:spPr>
-          <a:xfrm>
-            <a:off x="7340501" y="177701"/>
-            <a:ext cx="1168301" cy="279350"/>
-          </a:xfrm>
-          <a:prstGeom prst="roundRect">
-            <a:avLst>
-              <a:gd name="adj" fmla="val 22731"/>
-            </a:avLst>
-          </a:prstGeom>
-          <a:solidFill>
-            <a:srgbClr val="1A7F37"/>
-          </a:solidFill>
-          <a:ln/>
-        </p:spPr>
-        <p:txBody>
-          <a:bodyPr wrap="square" rtlCol="0" anchor="ctr"/>
-          <a:lstStyle/>
-          <a:p>
-            <a:pPr indent="0" marL="0">
-              <a:buNone/>
-            </a:pPr>
-            <a:endParaRPr lang="en-US" dirty="0"/>
-          </a:p>
-        </p:txBody>
-      </p:sp>
-      <p:sp>
-        <p:nvSpPr>
-          <p:cNvPr id="4" name="Text 1"/>
-          <p:cNvSpPr/>
-          <p:nvPr/>
-        </p:nvSpPr>
-        <p:spPr>
-          <a:xfrm>
-            <a:off x="7461041" y="231577"/>
-            <a:ext cx="927071" cy="171450"/>
-          </a:xfrm>
-          <a:prstGeom prst="rect">
-            <a:avLst/>
-          </a:prstGeom>
-          <a:noFill/>
-          <a:ln/>
-        </p:spPr>
-        <p:txBody>
-          <a:bodyPr wrap="square" lIns="0" tIns="0" rIns="0" bIns="0" rtlCol="0" anchor="t"/>
-          <a:lstStyle/>
-          <a:p>
-            <a:pPr algn="ctr" indent="0" marL="0">
-              <a:buNone/>
-            </a:pPr>
-            <a:r>
-              <a:rPr lang="en-US" sz="1150" b="1" dirty="0">
-                <a:solidFill>
-                  <a:srgbClr val="FFFFFF"/>
-                </a:solidFill>
-                <a:latin typeface="Arial" pitchFamily="34" charset="0"/>
-                <a:ea typeface="Arial" pitchFamily="34" charset="-122"/>
-                <a:cs typeface="Arial" pitchFamily="34" charset="-120"/>
-              </a:rPr>
-              <a:t>CHAPTER 02</a:t>
-            </a:r>
-            <a:endParaRPr lang="en-US" sz="1150" dirty="0"/>
-          </a:p>
-        </p:txBody>
-      </p:sp>
-      <p:pic>
-        <p:nvPicPr>
-          <p:cNvPr id="5" name="Image 1" descr="Open this chapter on GitHub">
-            <a:hlinkClick r:id="rId3" tooltip="https://github.com/github/copilot-app-for-beginners/tree/main/02-sessions-worktrees-context"/>
-          </p:cNvPr>
-          <p:cNvPicPr>
-            <a:picLocks noChangeAspect="1"/>
-          </p:cNvPicPr>
-          <p:nvPr/>
-        </p:nvPicPr>
-        <p:blipFill>
-          <a:blip r:embed="rId2"/>
-          <a:stretch>
-            <a:fillRect/>
-          </a:stretch>
-        </p:blipFill>
-        <p:spPr>
-          <a:xfrm>
-            <a:off x="8610600" y="165050"/>
-            <a:ext cx="304800" cy="304800"/>
-          </a:xfrm>
-          <a:prstGeom prst="rect">
-            <a:avLst/>
-          </a:prstGeom>
-        </p:spPr>
-      </p:pic>
-      <p:sp>
-        <p:nvSpPr>
-          <p:cNvPr id="6" name="Text 2"/>
-          <p:cNvSpPr/>
-          <p:nvPr/>
-        </p:nvSpPr>
-        <p:spPr>
-          <a:xfrm>
-            <a:off x="507950" y="381000"/>
-            <a:ext cx="8161020" cy="190500"/>
-          </a:xfrm>
-          <a:prstGeom prst="rect">
-            <a:avLst/>
-          </a:prstGeom>
-          <a:noFill/>
-          <a:ln/>
-        </p:spPr>
-        <p:txBody>
-          <a:bodyPr wrap="square" lIns="0" tIns="0" rIns="0" bIns="0" rtlCol="0" anchor="t"/>
-          <a:lstStyle/>
-          <a:p>
-            <a:pPr algn="l" indent="0" marL="0">
-              <a:buNone/>
-            </a:pPr>
-            <a:r>
-              <a:rPr lang="en-US" sz="1250" b="1" dirty="0">
-                <a:solidFill>
-                  <a:srgbClr val="1A7F37"/>
-                </a:solidFill>
-                <a:latin typeface="Arial" pitchFamily="34" charset="0"/>
-                <a:ea typeface="Arial" pitchFamily="34" charset="-122"/>
-                <a:cs typeface="Arial" pitchFamily="34" charset="-120"/>
-              </a:rPr>
-              <a:t>INSPECT THE SESSION</a:t>
-            </a:r>
-            <a:endParaRPr lang="en-US" sz="1250" dirty="0"/>
-          </a:p>
-        </p:txBody>
-      </p:sp>
-      <p:sp>
-        <p:nvSpPr>
-          <p:cNvPr id="7" name="Text 3"/>
-          <p:cNvSpPr/>
-          <p:nvPr/>
-        </p:nvSpPr>
-        <p:spPr>
-          <a:xfrm>
-            <a:off x="507950" y="622250"/>
-            <a:ext cx="8161020" cy="419100"/>
-          </a:xfrm>
-          <a:prstGeom prst="rect">
-            <a:avLst/>
-          </a:prstGeom>
-          <a:noFill/>
-          <a:ln/>
-        </p:spPr>
-        <p:txBody>
-          <a:bodyPr wrap="square" lIns="0" tIns="0" rIns="0" bIns="0" rtlCol="0" anchor="t"/>
-          <a:lstStyle/>
-          <a:p>
-            <a:pPr algn="l" indent="0" marL="0">
-              <a:lnSpc>
-                <a:spcPts val="3300"/>
-              </a:lnSpc>
-              <a:spcBef>
-                <a:spcPts val="400"/>
-              </a:spcBef>
-              <a:buNone/>
-            </a:pPr>
-            <a:r>
-              <a:rPr lang="en-US" sz="2800" b="1" dirty="0">
-                <a:solidFill>
-                  <a:srgbClr val="1F2328"/>
-                </a:solidFill>
-                <a:latin typeface="Arial" pitchFamily="34" charset="0"/>
-                <a:ea typeface="Arial" pitchFamily="34" charset="-122"/>
-                <a:cs typeface="Arial" pitchFamily="34" charset="-120"/>
-              </a:rPr>
-              <a:t>Ask the session what it did</a:t>
-            </a:r>
-            <a:endParaRPr lang="en-US" sz="2800" dirty="0"/>
-          </a:p>
-        </p:txBody>
-      </p:sp>
-      <p:sp>
-        <p:nvSpPr>
-          <p:cNvPr id="8" name="Text 4"/>
-          <p:cNvSpPr/>
-          <p:nvPr/>
-        </p:nvSpPr>
-        <p:spPr>
-          <a:xfrm>
-            <a:off x="511076" y="1937742"/>
-            <a:ext cx="3956000" cy="1621780"/>
-          </a:xfrm>
-          <a:prstGeom prst="roundRect">
-            <a:avLst>
-              <a:gd name="adj" fmla="val 4699"/>
-            </a:avLst>
-          </a:prstGeom>
-          <a:solidFill>
-            <a:srgbClr val="FFFFFF"/>
-          </a:solidFill>
-          <a:ln w="9525">
-            <a:solidFill>
-              <a:srgbClr val="D1D9E0"/>
-            </a:solidFill>
-          </a:ln>
-          <a:effectLst>
-            <a:outerShdw sx="100000" sy="100000" kx="0" ky="0" algn="bl" rotWithShape="0" blurRad="38100" dist="9525" dir="5400000">
-              <a:srgbClr val="1f2328">
-                <a:alpha val="12000"/>
-              </a:srgbClr>
-            </a:outerShdw>
-          </a:effectLst>
-        </p:spPr>
-        <p:txBody>
-          <a:bodyPr wrap="square" rtlCol="0" anchor="ctr"/>
-          <a:lstStyle/>
-          <a:p>
-            <a:pPr indent="0" marL="0">
-              <a:buNone/>
-            </a:pPr>
-            <a:endParaRPr lang="en-US" dirty="0"/>
-          </a:p>
-        </p:txBody>
-      </p:sp>
-      <p:pic>
-        <p:nvPicPr>
-          <p:cNvPr id="9" name="Image 2" descr="Chronicle standup report that lists this session's empty-state copy work under Done">    </p:cNvPr>
-          <p:cNvPicPr>
-            <a:picLocks noChangeAspect="1"/>
-          </p:cNvPicPr>
-          <p:nvPr/>
-        </p:nvPicPr>
-        <p:blipFill>
-          <a:blip r:embed="rId4"/>
-          <a:stretch>
-            <a:fillRect/>
-          </a:stretch>
-        </p:blipFill>
-        <p:spPr>
-          <a:xfrm>
-            <a:off x="558701" y="1985367"/>
-            <a:ext cx="3860750" cy="1526530"/>
-          </a:xfrm>
-          <a:prstGeom prst="rect">
-            <a:avLst/>
-          </a:prstGeom>
-        </p:spPr>
-      </p:pic>
-      <p:sp>
-        <p:nvSpPr>
-          <p:cNvPr id="10" name="Text 5"/>
-          <p:cNvSpPr/>
-          <p:nvPr/>
-        </p:nvSpPr>
-        <p:spPr>
-          <a:xfrm>
-            <a:off x="507950" y="4171057"/>
-            <a:ext cx="4041648" cy="242590"/>
-          </a:xfrm>
-          <a:prstGeom prst="rect">
-            <a:avLst/>
-          </a:prstGeom>
-          <a:noFill/>
-          <a:ln/>
-        </p:spPr>
-        <p:txBody>
-          <a:bodyPr wrap="square" lIns="0" tIns="0" rIns="0" bIns="0" rtlCol="0" anchor="t"/>
-          <a:lstStyle/>
-          <a:p>
-            <a:pPr algn="l" indent="0" marL="0">
-              <a:lnSpc>
-                <a:spcPts val="1760"/>
-              </a:lnSpc>
-              <a:buNone/>
-            </a:pPr>
-            <a:r>
-              <a:rPr lang="en-US" sz="1450" b="1" dirty="0">
-                <a:solidFill>
-                  <a:srgbClr val="0550AE"/>
-                </a:solidFill>
-                <a:latin typeface="Courier New" pitchFamily="34" charset="0"/>
-                <a:ea typeface="Courier New" pitchFamily="34" charset="-122"/>
-                <a:cs typeface="Courier New" pitchFamily="34" charset="-120"/>
-              </a:rPr>
-              <a:t>/chronicle standup</a:t>
-            </a:r>
-            <a:pPr algn="l" indent="0" marL="0">
-              <a:lnSpc>
-                <a:spcPts val="1760"/>
-              </a:lnSpc>
-              <a:buNone/>
-            </a:pPr>
-            <a:r>
-              <a:rPr lang="en-US" sz="1450" dirty="0">
-                <a:solidFill>
-                  <a:srgbClr val="59636E"/>
-                </a:solidFill>
-                <a:latin typeface="Arial" pitchFamily="34" charset="0"/>
-                <a:ea typeface="Arial" pitchFamily="34" charset="-122"/>
-                <a:cs typeface="Arial" pitchFamily="34" charset="-120"/>
-              </a:rPr>
-              <a:t> recaps your last day.</a:t>
-            </a:r>
-            <a:endParaRPr lang="en-US" sz="1450" dirty="0"/>
-          </a:p>
-        </p:txBody>
-      </p:sp>
-      <p:sp>
-        <p:nvSpPr>
-          <p:cNvPr id="11" name="Text 6"/>
-          <p:cNvSpPr/>
-          <p:nvPr/>
-        </p:nvSpPr>
-        <p:spPr>
-          <a:xfrm>
-            <a:off x="4776341" y="1481882"/>
-            <a:ext cx="3756571" cy="2533650"/>
-          </a:xfrm>
-          <a:prstGeom prst="roundRect">
-            <a:avLst>
-              <a:gd name="adj" fmla="val 3008"/>
-            </a:avLst>
-          </a:prstGeom>
-          <a:solidFill>
-            <a:srgbClr val="FFFFFF"/>
-          </a:solidFill>
-          <a:ln w="9525">
-            <a:solidFill>
-              <a:srgbClr val="D1D9E0"/>
-            </a:solidFill>
-          </a:ln>
-          <a:effectLst>
-            <a:outerShdw sx="100000" sy="100000" kx="0" ky="0" algn="bl" rotWithShape="0" blurRad="38100" dist="9525" dir="5400000">
-              <a:srgbClr val="1f2328">
-                <a:alpha val="12000"/>
-              </a:srgbClr>
-            </a:outerShdw>
-          </a:effectLst>
-        </p:spPr>
-        <p:txBody>
-          <a:bodyPr wrap="square" rtlCol="0" anchor="ctr"/>
-          <a:lstStyle/>
-          <a:p>
-            <a:pPr indent="0" marL="0">
-              <a:buNone/>
-            </a:pPr>
-            <a:endParaRPr lang="en-US" dirty="0"/>
-          </a:p>
-        </p:txBody>
-      </p:sp>
-      <p:pic>
-        <p:nvPicPr>
-          <p:cNvPr id="12" name="Image 3" descr="Session menu with the session details, token totals, the expanded Context breakdown, and session spend">    </p:cNvPr>
-          <p:cNvPicPr>
-            <a:picLocks noChangeAspect="1"/>
-          </p:cNvPicPr>
-          <p:nvPr/>
-        </p:nvPicPr>
-        <p:blipFill>
-          <a:blip r:embed="rId5"/>
-          <a:stretch>
-            <a:fillRect/>
-          </a:stretch>
-        </p:blipFill>
-        <p:spPr>
-          <a:xfrm>
-            <a:off x="4823966" y="1529507"/>
-            <a:ext cx="3661321" cy="2438400"/>
-          </a:xfrm>
-          <a:prstGeom prst="rect">
-            <a:avLst/>
-          </a:prstGeom>
-        </p:spPr>
-      </p:pic>
-      <p:sp>
-        <p:nvSpPr>
-          <p:cNvPr id="13" name="Text 7"/>
-          <p:cNvSpPr/>
-          <p:nvPr/>
-        </p:nvSpPr>
-        <p:spPr>
-          <a:xfrm>
-            <a:off x="4673501" y="4171057"/>
-            <a:ext cx="4041648" cy="242590"/>
-          </a:xfrm>
-          <a:prstGeom prst="rect">
-            <a:avLst/>
-          </a:prstGeom>
-          <a:noFill/>
-          <a:ln/>
-        </p:spPr>
-        <p:txBody>
-          <a:bodyPr wrap="square" lIns="0" tIns="0" rIns="0" bIns="0" rtlCol="0" anchor="t"/>
-          <a:lstStyle/>
-          <a:p>
-            <a:pPr algn="l" indent="0" marL="0">
-              <a:lnSpc>
-                <a:spcPts val="1760"/>
-              </a:lnSpc>
-              <a:buNone/>
-            </a:pPr>
-            <a:r>
-              <a:rPr lang="en-US" sz="1450" b="1" dirty="0">
-                <a:solidFill>
-                  <a:srgbClr val="0550AE"/>
-                </a:solidFill>
-                <a:latin typeface="Courier New" pitchFamily="34" charset="0"/>
-                <a:ea typeface="Courier New" pitchFamily="34" charset="-122"/>
-                <a:cs typeface="Courier New" pitchFamily="34" charset="-120"/>
-              </a:rPr>
-              <a:t>/context</a:t>
-            </a:r>
-            <a:pPr algn="l" indent="0" marL="0">
-              <a:lnSpc>
-                <a:spcPts val="1760"/>
-              </a:lnSpc>
-              <a:buNone/>
-            </a:pPr>
-            <a:r>
-              <a:rPr lang="en-US" sz="1450" dirty="0">
-                <a:solidFill>
-                  <a:srgbClr val="59636E"/>
-                </a:solidFill>
-                <a:latin typeface="Arial" pitchFamily="34" charset="0"/>
-                <a:ea typeface="Arial" pitchFamily="34" charset="-122"/>
-                <a:cs typeface="Arial" pitchFamily="34" charset="-120"/>
-              </a:rPr>
-              <a:t> shows context use and spend.</a:t>
-            </a:r>
-            <a:endParaRPr lang="en-US" sz="1450" dirty="0"/>
-          </a:p>
-        </p:txBody>
-      </p:sp>
-    </p:spTree>
-  </p:cSld>
-  <p:clrMapOvr>
-    <a:masterClrMapping/>
-  </p:clrMapOvr>
-</p:sld>
+<ns0:sld xmlns:ns0="http://schemas.openxmlformats.org/presentationml/2006/main" xmlns:ns1="http://schemas.openxmlformats.org/drawingml/2006/main" xmlns:ns2="http://schemas.microsoft.com/office/drawing/2017/decorative" xmlns:ns3="http://schemas.openxmlformats.org/officeDocument/2006/relationships">
+  <ns0:cSld name="Slide 13">
+    <ns0:bg>
+      <ns0:bgPr>
+        <ns1:solidFill>
+          <ns1:srgbClr val="FFFFFF"/>
+        </ns1:solidFill>
+      </ns0:bgPr>
+    </ns0:bg>
+    <ns0:spTree>
+      <ns0:nvGrpSpPr>
+        <ns0:cNvPr id="1" name=""/>
+        <ns0:cNvGrpSpPr/>
+        <ns0:nvPr/>
+      </ns0:nvGrpSpPr>
+      <ns0:grpSpPr>
+        <ns1:xfrm>
+          <ns1:off x="0" y="0"/>
+          <ns1:ext cx="0" cy="0"/>
+          <ns1:chOff x="0" y="0"/>
+          <ns1:chExt cx="0" cy="0"/>
+        </ns1:xfrm>
+      </ns0:grpSpPr>
+      <ns0:pic>
+        <ns0:nvPicPr>
+          <ns0:cNvPr id="2" name="Image 0" descr="">
+            <ns1:extLst>
+              <ns1:ext uri="{C183D7F6-B498-43B3-948B-1728B52AA6E4}">
+                <ns2:decorative val="1"/>
+              </ns1:ext>
+            </ns1:extLst>
+          </ns0:cNvPr>
+          <ns0:cNvPicPr>
+            <ns1:picLocks noChangeAspect="1"/>
+          </ns0:cNvPicPr>
+          <ns0:nvPr/>
+        </ns0:nvPicPr>
+        <ns0:blipFill>
+          <ns1:blip ns3:embed="rId1"/>
+          <ns1:stretch>
+            <ns1:fillRect/>
+          </ns1:stretch>
+        </ns0:blipFill>
+        <ns0:spPr>
+          <ns1:xfrm>
+            <ns1:off x="6349901" y="0"/>
+            <ns1:ext cx="2793950" cy="1308050"/>
+          </ns1:xfrm>
+          <ns1:prstGeom prst="rect">
+            <ns1:avLst/>
+          </ns1:prstGeom>
+        </ns0:spPr>
+      </ns0:pic>
+      <ns0:sp>
+        <ns0:nvSpPr>
+          <ns0:cNvPr id="3" name="Text 0"/>
+          <ns0:cNvSpPr/>
+          <ns0:nvPr/>
+        </ns0:nvSpPr>
+        <ns0:spPr>
+          <ns1:xfrm>
+            <ns1:off x="7340501" y="177701"/>
+            <ns1:ext cx="1168301" cy="279350"/>
+          </ns1:xfrm>
+          <ns1:prstGeom prst="roundRect">
+            <ns1:avLst>
+              <ns1:gd name="adj" fmla="val 22731"/>
+            </ns1:avLst>
+          </ns1:prstGeom>
+          <ns1:solidFill>
+            <ns1:srgbClr val="1A7F37"/>
+          </ns1:solidFill>
+          <ns1:ln/>
+        </ns0:spPr>
+        <ns0:txBody>
+          <ns1:bodyPr wrap="square" rtlCol="0" anchor="ctr"/>
+          <ns1:lstStyle/>
+          <ns1:p>
+            <ns1:pPr indent="0" marL="0">
+              <ns1:buNone/>
+            </ns1:pPr>
+            <ns1:endParaRPr lang="en-US" dirty="0"/>
+          </ns1:p>
+        </ns0:txBody>
+      </ns0:sp>
+      <ns0:sp>
+        <ns0:nvSpPr>
+          <ns0:cNvPr id="4" name="Text 1"/>
+          <ns0:cNvSpPr/>
+          <ns0:nvPr/>
+        </ns0:nvSpPr>
+        <ns0:spPr>
+          <ns1:xfrm>
+            <ns1:off x="7461041" y="231577"/>
+            <ns1:ext cx="927071" cy="171450"/>
+          </ns1:xfrm>
+          <ns1:prstGeom prst="rect">
+            <ns1:avLst/>
+          </ns1:prstGeom>
+          <ns1:noFill/>
+          <ns1:ln/>
+        </ns0:spPr>
+        <ns0:txBody>
+          <ns1:bodyPr wrap="square" lIns="0" tIns="0" rIns="0" bIns="0" rtlCol="0" anchor="t"/>
+          <ns1:lstStyle/>
+          <ns1:p>
+            <ns1:pPr algn="ctr" indent="0" marL="0">
+              <ns1:buNone/>
+            </ns1:pPr>
+            <ns1:r>
+              <ns1:rPr lang="en-US" sz="1150" b="1" dirty="0">
+                <ns1:solidFill>
+                  <ns1:srgbClr val="FFFFFF"/>
+                </ns1:solidFill>
+                <ns1:latin typeface="Arial" pitchFamily="34" charset="0"/>
+                <ns1:ea typeface="Arial" pitchFamily="34" charset="-122"/>
+                <ns1:cs typeface="Arial" pitchFamily="34" charset="-120"/>
+              </ns1:rPr>
+              <ns1:t>CHAPTER 02</ns1:t>
+            </ns1:r>
+            <ns1:endParaRPr lang="en-US" sz="1150" dirty="0"/>
+          </ns1:p>
+        </ns0:txBody>
+      </ns0:sp>
+      <ns0:pic>
+        <ns0:nvPicPr>
+          <ns0:cNvPr id="5" name="Image 1" descr="Open this chapter on GitHub">
+            <ns1:hlinkClick ns3:id="rId3" tooltip="https://github.com/github/copilot-app-for-beginners/tree/main/02-sessions-worktrees-context"/>
+          </ns0:cNvPr>
+          <ns0:cNvPicPr>
+            <ns1:picLocks noChangeAspect="1"/>
+          </ns0:cNvPicPr>
+          <ns0:nvPr/>
+        </ns0:nvPicPr>
+        <ns0:blipFill>
+          <ns1:blip ns3:embed="rId2"/>
+          <ns1:stretch>
+            <ns1:fillRect/>
+          </ns1:stretch>
+        </ns0:blipFill>
+        <ns0:spPr>
+          <ns1:xfrm>
+            <ns1:off x="8610600" y="165050"/>
+            <ns1:ext cx="304800" cy="304800"/>
+          </ns1:xfrm>
+          <ns1:prstGeom prst="rect">
+            <ns1:avLst/>
+          </ns1:prstGeom>
+        </ns0:spPr>
+      </ns0:pic>
+      <ns0:sp>
+        <ns0:nvSpPr>
+          <ns0:cNvPr id="6" name="Text 2"/>
+          <ns0:cNvSpPr/>
+          <ns0:nvPr/>
+        </ns0:nvSpPr>
+        <ns0:spPr>
+          <ns1:xfrm>
+            <ns1:off x="507950" y="381000"/>
+            <ns1:ext cx="8161020" cy="190500"/>
+          </ns1:xfrm>
+          <ns1:prstGeom prst="rect">
+            <ns1:avLst/>
+          </ns1:prstGeom>
+          <ns1:noFill/>
+          <ns1:ln/>
+        </ns0:spPr>
+        <ns0:txBody>
+          <ns1:bodyPr wrap="square" lIns="0" tIns="0" rIns="0" bIns="0" rtlCol="0" anchor="t"/>
+          <ns1:lstStyle/>
+          <ns1:p>
+            <ns1:pPr algn="l" indent="0" marL="0">
+              <ns1:buNone/>
+            </ns1:pPr>
+            <ns1:r>
+              <ns1:rPr lang="en-US" sz="1250" b="1" dirty="0">
+                <ns1:solidFill>
+                  <ns1:srgbClr val="1A7F37"/>
+                </ns1:solidFill>
+                <ns1:latin typeface="Arial" pitchFamily="34" charset="0"/>
+                <ns1:ea typeface="Arial" pitchFamily="34" charset="-122"/>
+                <ns1:cs typeface="Arial" pitchFamily="34" charset="-120"/>
+              </ns1:rPr>
+              <ns1:t>INSPECT THE SESSION</ns1:t>
+            </ns1:r>
+            <ns1:endParaRPr lang="en-US" sz="1250" dirty="0"/>
+          </ns1:p>
+        </ns0:txBody>
+      </ns0:sp>
+      <ns0:sp>
+        <ns0:nvSpPr>
+          <ns0:cNvPr id="7" name="Text 3"/>
+          <ns0:cNvSpPr/>
+          <ns0:nvPr/>
+        </ns0:nvSpPr>
+        <ns0:spPr>
+          <ns1:xfrm>
+            <ns1:off x="507950" y="622250"/>
+            <ns1:ext cx="8161020" cy="419100"/>
+          </ns1:xfrm>
+          <ns1:prstGeom prst="rect">
+            <ns1:avLst/>
+          </ns1:prstGeom>
+          <ns1:noFill/>
+          <ns1:ln/>
+        </ns0:spPr>
+        <ns0:txBody>
+          <ns1:bodyPr wrap="square" lIns="0" tIns="0" rIns="0" bIns="0" rtlCol="0" anchor="t"/>
+          <ns1:lstStyle/>
+          <ns1:p>
+            <ns1:pPr algn="l" indent="0" marL="0">
+              <ns1:lnSpc>
+                <ns1:spcPts val="3300"/>
+              </ns1:lnSpc>
+              <ns1:spcBef>
+                <ns1:spcPts val="400"/>
+              </ns1:spcBef>
+              <ns1:buNone/>
+            </ns1:pPr>
+            <ns1:r>
+              <ns1:rPr lang="en-US" sz="2800" b="1" dirty="0">
+                <ns1:solidFill>
+                  <ns1:srgbClr val="1F2328"/>
+                </ns1:solidFill>
+                <ns1:latin typeface="Arial" pitchFamily="34" charset="0"/>
+                <ns1:ea typeface="Arial" pitchFamily="34" charset="-122"/>
+                <ns1:cs typeface="Arial" pitchFamily="34" charset="-120"/>
+              </ns1:rPr>
+              <ns1:t>Ask the session what it did</ns1:t>
+            </ns1:r>
+            <ns1:endParaRPr lang="en-US" sz="2800" dirty="0"/>
+          </ns1:p>
+        </ns0:txBody>
+      </ns0:sp>
+      <ns0:sp>
+        <ns0:nvSpPr>
+          <ns0:cNvPr id="8" name="Text 4"/>
+          <ns0:cNvSpPr/>
+          <ns0:nvPr/>
+        </ns0:nvSpPr>
+        <ns0:spPr>
+          <ns1:xfrm>
+            <ns1:off x="511076" y="1937742"/>
+            <ns1:ext cx="3956000" cy="1621780"/>
+          </ns1:xfrm>
+          <ns1:prstGeom prst="roundRect">
+            <ns1:avLst>
+              <ns1:gd name="adj" fmla="val 4699"/>
+            </ns1:avLst>
+          </ns1:prstGeom>
+          <ns1:solidFill>
+            <ns1:srgbClr val="FFFFFF"/>
+          </ns1:solidFill>
+          <ns1:ln w="9525">
+            <ns1:solidFill>
+              <ns1:srgbClr val="D1D9E0"/>
+            </ns1:solidFill>
+          </ns1:ln>
+          <ns1:effectLst>
+            <ns1:outerShdw sx="100000" sy="100000" kx="0" ky="0" algn="bl" rotWithShape="0" blurRad="38100" dist="9525" dir="5400000">
+              <ns1:srgbClr val="1f2328">
+                <ns1:alpha val="12000"/>
+              </ns1:srgbClr>
+            </ns1:outerShdw>
+          </ns1:effectLst>
+        </ns0:spPr>
+        <ns0:txBody>
+          <ns1:bodyPr wrap="square" rtlCol="0" anchor="ctr"/>
+          <ns1:lstStyle/>
+          <ns1:p>
+            <ns1:pPr indent="0" marL="0">
+              <ns1:buNone/>
+            </ns1:pPr>
+            <ns1:endParaRPr lang="en-US" dirty="0"/>
+          </ns1:p>
+        </ns0:txBody>
+      </ns0:sp>
+      <ns0:pic>
+        <ns0:nvPicPr>
+          <ns0:cNvPr id="9" name="Image 2" descr="Chronicle standup report that lists this session's empty-state copy work under Done"/>
+          <ns0:cNvPicPr>
+            <ns1:picLocks noChangeAspect="1"/>
+          </ns0:cNvPicPr>
+          <ns0:nvPr/>
+        </ns0:nvPicPr>
+        <ns0:blipFill>
+          <ns1:blip ns3:embed="rId4"/>
+          <ns1:stretch>
+            <ns1:fillRect/>
+          </ns1:stretch>
+        </ns0:blipFill>
+        <ns0:spPr>
+          <ns1:xfrm>
+            <ns1:off x="558701" y="1985367"/>
+            <ns1:ext cx="3860750" cy="1526530"/>
+          </ns1:xfrm>
+          <ns1:prstGeom prst="rect">
+            <ns1:avLst/>
+          </ns1:prstGeom>
+        </ns0:spPr>
+      </ns0:pic>
+      <ns0:sp>
+        <ns0:nvSpPr>
+          <ns0:cNvPr id="10" name="Text 5"/>
+          <ns0:cNvSpPr/>
+          <ns0:nvPr/>
+        </ns0:nvSpPr>
+        <ns0:spPr>
+          <ns1:xfrm>
+            <ns1:off x="507950" y="4171057"/>
+            <ns1:ext cx="4041648" cy="242590"/>
+          </ns1:xfrm>
+          <ns1:prstGeom prst="rect">
+            <ns1:avLst/>
+          </ns1:prstGeom>
+          <ns1:noFill/>
+          <ns1:ln/>
+        </ns0:spPr>
+        <ns0:txBody>
+          <ns1:bodyPr wrap="square" lIns="0" tIns="0" rIns="0" bIns="0" rtlCol="0" anchor="t"/>
+          <ns1:lstStyle/>
+          <ns1:p>
+            <ns1:pPr algn="l" indent="0" marL="0">
+              <ns1:lnSpc>
+                <ns1:spcPts val="1760"/>
+              </ns1:lnSpc>
+              <ns1:buNone/>
+            </ns1:pPr>
+            <ns1:r>
+              <ns1:rPr lang="en-US" sz="1450" b="1" dirty="0">
+                <ns1:solidFill>
+                  <ns1:srgbClr val="0550AE"/>
+                </ns1:solidFill>
+                <ns1:latin typeface="Courier New" pitchFamily="34" charset="0"/>
+                <ns1:ea typeface="Courier New" pitchFamily="34" charset="-122"/>
+                <ns1:cs typeface="Courier New" pitchFamily="34" charset="-120"/>
+              </ns1:rPr>
+              <ns1:t>/chronicle standup</ns1:t>
+            </ns1:r>
+            <ns1:pPr algn="l" indent="0" marL="0">
+              <ns1:lnSpc>
+                <ns1:spcPts val="1760"/>
+              </ns1:lnSpc>
+              <ns1:buNone/>
+            </ns1:pPr>
+            <ns1:r>
+              <ns1:rPr lang="en-US" sz="1450" dirty="0">
+                <ns1:solidFill>
+                  <ns1:srgbClr val="59636E"/>
+                </ns1:solidFill>
+                <ns1:latin typeface="Arial" pitchFamily="34" charset="0"/>
+                <ns1:ea typeface="Arial" pitchFamily="34" charset="-122"/>
+                <ns1:cs typeface="Arial" pitchFamily="34" charset="-120"/>
+              </ns1:rPr>
+              <ns1:t> recaps your last day.</ns1:t>
+            </ns1:r>
+            <ns1:endParaRPr lang="en-US" sz="1450" dirty="0"/>
+          </ns1:p>
+        </ns0:txBody>
+      </ns0:sp>
+      <ns0:sp>
+        <ns0:nvSpPr>
+          <ns0:cNvPr id="11" name="Text 6"/>
+          <ns0:cNvSpPr/>
+          <ns0:nvPr/>
+        </ns0:nvSpPr>
+        <ns0:spPr>
+          <ns1:xfrm>
+            <ns1:off x="4776341" y="1481882"/>
+            <ns1:ext cx="3756571" cy="2533650"/>
+          </ns1:xfrm>
+          <ns1:prstGeom prst="roundRect">
+            <ns1:avLst>
+              <ns1:gd name="adj" fmla="val 3008"/>
+            </ns1:avLst>
+          </ns1:prstGeom>
+          <ns1:solidFill>
+            <ns1:srgbClr val="FFFFFF"/>
+          </ns1:solidFill>
+          <ns1:ln w="9525">
+            <ns1:solidFill>
+              <ns1:srgbClr val="D1D9E0"/>
+            </ns1:solidFill>
+          </ns1:ln>
+          <ns1:effectLst>
+            <ns1:outerShdw sx="100000" sy="100000" kx="0" ky="0" algn="bl" rotWithShape="0" blurRad="38100" dist="9525" dir="5400000">
+              <ns1:srgbClr val="1f2328">
+                <ns1:alpha val="12000"/>
+              </ns1:srgbClr>
+            </ns1:outerShdw>
+          </ns1:effectLst>
+        </ns0:spPr>
+        <ns0:txBody>
+          <ns1:bodyPr wrap="square" rtlCol="0" anchor="ctr"/>
+          <ns1:lstStyle/>
+          <ns1:p>
+            <ns1:pPr indent="0" marL="0">
+              <ns1:buNone/>
+            </ns1:pPr>
+            <ns1:endParaRPr lang="en-US" dirty="0"/>
+          </ns1:p>
+        </ns0:txBody>
+      </ns0:sp>
+      <ns0:pic>
+        <ns0:nvPicPr>
+          <ns0:cNvPr id="12" name="Image 3" descr="Usage popup with plan usage, session AI credits, token totals, and the expanded Context breakdown"/>
+          <ns0:cNvPicPr>
+            <ns1:picLocks noChangeAspect="1"/>
+          </ns0:cNvPicPr>
+          <ns0:nvPr/>
+        </ns0:nvPicPr>
+        <ns0:blipFill>
+          <ns1:blip ns3:embed="rId5"/>
+          <ns1:stretch>
+            <ns1:fillRect/>
+          </ns1:stretch>
+        </ns0:blipFill>
+        <ns0:spPr>
+          <ns1:xfrm>
+            <ns1:off x="4823966" y="1529507"/>
+            <ns1:ext cx="3661321" cy="2438400"/>
+          </ns1:xfrm>
+          <ns1:prstGeom prst="rect">
+            <ns1:avLst/>
+          </ns1:prstGeom>
+        </ns0:spPr>
+      </ns0:pic>
+      <ns0:sp>
+        <ns0:nvSpPr>
+          <ns0:cNvPr id="13" name="Text 7"/>
+          <ns0:cNvSpPr/>
+          <ns0:nvPr/>
+        </ns0:nvSpPr>
+        <ns0:spPr>
+          <ns1:xfrm>
+            <ns1:off x="4673501" y="4171057"/>
+            <ns1:ext cx="4041648" cy="242590"/>
+          </ns1:xfrm>
+          <ns1:prstGeom prst="rect">
+            <ns1:avLst/>
+          </ns1:prstGeom>
+          <ns1:noFill/>
+          <ns1:ln/>
+        </ns0:spPr>
+        <ns0:txBody>
+          <ns1:bodyPr wrap="square" lIns="0" tIns="0" rIns="0" bIns="0" rtlCol="0" anchor="t"/>
+          <ns1:lstStyle/>
+          <ns1:p>
+            <ns1:pPr algn="l" indent="0" marL="0">
+              <ns1:lnSpc>
+                <ns1:spcPts val="1760"/>
+              </ns1:lnSpc>
+              <ns1:buNone/>
+            </ns1:pPr>
+            <ns1:r>
+              <ns1:rPr lang="en-US" sz="1450" b="1" dirty="0">
+                <ns1:solidFill>
+                  <ns1:srgbClr val="0550AE"/>
+                </ns1:solidFill>
+                <ns1:latin typeface="Courier New" pitchFamily="34" charset="0"/>
+                <ns1:ea typeface="Courier New" pitchFamily="34" charset="-122"/>
+                <ns1:cs typeface="Courier New" pitchFamily="34" charset="-120"/>
+              </ns1:rPr>
+              <ns1:t>/context opens usage details.</ns1:t>
+            </ns1:r>
+            <ns1:pPr algn="l" indent="0" marL="0">
+              <ns1:lnSpc>
+                <ns1:spcPts val="1760"/>
+              </ns1:lnSpc>
+              <ns1:buNone/>
+            </ns1:pPr>
+            <ns1:r>
+              <ns1:rPr lang="en-US" sz="1450" dirty="0">
+                <ns1:solidFill>
+                  <ns1:srgbClr val="59636E"/>
+                </ns1:solidFill>
+                <ns1:latin typeface="Arial" pitchFamily="34" charset="0"/>
+                <ns1:ea typeface="Arial" pitchFamily="34" charset="-122"/>
+                <ns1:cs typeface="Arial" pitchFamily="34" charset="-120"/>
+              </ns1:rPr>
+              <ns1:t/>
+            </ns1:r>
+            <ns1:endParaRPr lang="en-US" sz="1450" dirty="0"/>
+          </ns1:p>
+        </ns0:txBody>
+      </ns0:sp>
+    </ns0:spTree>
+  </ns0:cSld>
+  <ns0:clrMapOvr>
+    <ns1:masterClrMapping/>
+  </ns0:clrMapOvr>
+</ns0:sld>
 </file>
 
 <file path=ppt/slides/slide14.xml><?xml version="1.0" encoding="utf-8"?>
-<p:sld xmlns:a="http://schemas.openxmlformats.org/drawingml/2006/main" xmlns:r="http://schemas.openxmlformats.org/officeDocument/2006/relationships" xmlns:p="http://schemas.openxmlformats.org/presentationml/2006/main">
-  <p:cSld name="Slide 14">
-    <p:bg>
-      <p:bgPr>
-        <a:solidFill>
-          <a:srgbClr val="FFFFFF"/>
-        </a:solidFill>
-      </p:bgPr>
-    </p:bg>
-    <p:spTree>
-      <p:nvGrpSpPr>
-        <p:cNvPr id="1" name=""/>
-        <p:cNvGrpSpPr/>
-        <p:nvPr/>
-      </p:nvGrpSpPr>
-      <p:grpSpPr>
-        <a:xfrm>
-          <a:off x="0" y="0"/>
-          <a:ext cx="0" cy="0"/>
-          <a:chOff x="0" y="0"/>
-          <a:chExt cx="0" cy="0"/>
-        </a:xfrm>
-      </p:grpSpPr>
-      <p:pic>
-        <p:nvPicPr>
-          <p:cNvPr id="2" name="Image 0" descr="">
-            <a:extLst>
-              <a:ext uri="{C183D7F6-B498-43B3-948B-1728B52AA6E4}">
-                <adec:decorative xmlns:adec="http://schemas.microsoft.com/office/drawing/2017/decorative" val="1"/>
-              </a:ext>
-            </a:extLst>
-          </p:cNvPr>
-          <p:cNvPicPr>
-            <a:picLocks noChangeAspect="1"/>
-          </p:cNvPicPr>
-          <p:nvPr/>
-        </p:nvPicPr>
-        <p:blipFill>
-          <a:blip r:embed="rId1"/>
-          <a:stretch>
-            <a:fillRect/>
-          </a:stretch>
-        </p:blipFill>
-        <p:spPr>
-          <a:xfrm>
-            <a:off x="6349901" y="0"/>
-            <a:ext cx="2793950" cy="1308050"/>
-          </a:xfrm>
-          <a:prstGeom prst="rect">
-            <a:avLst/>
-          </a:prstGeom>
-        </p:spPr>
-      </p:pic>
-      <p:sp>
-        <p:nvSpPr>
-          <p:cNvPr id="3" name="Text 0"/>
-          <p:cNvSpPr/>
-          <p:nvPr/>
-        </p:nvSpPr>
-        <p:spPr>
-          <a:xfrm>
-            <a:off x="7340501" y="177701"/>
-            <a:ext cx="1168301" cy="279350"/>
-          </a:xfrm>
-          <a:prstGeom prst="roundRect">
-            <a:avLst>
-              <a:gd name="adj" fmla="val 22731"/>
-            </a:avLst>
-          </a:prstGeom>
-          <a:solidFill>
-            <a:srgbClr val="1A7F37"/>
-          </a:solidFill>
-          <a:ln/>
-        </p:spPr>
-        <p:txBody>
-          <a:bodyPr wrap="square" rtlCol="0" anchor="ctr"/>
-          <a:lstStyle/>
-          <a:p>
-            <a:pPr indent="0" marL="0">
-              <a:buNone/>
-            </a:pPr>
-            <a:endParaRPr lang="en-US" dirty="0"/>
-          </a:p>
-        </p:txBody>
-      </p:sp>
-      <p:sp>
-        <p:nvSpPr>
-          <p:cNvPr id="4" name="Text 1"/>
-          <p:cNvSpPr/>
-          <p:nvPr/>
-        </p:nvSpPr>
-        <p:spPr>
-          <a:xfrm>
-            <a:off x="7461041" y="231577"/>
-            <a:ext cx="927071" cy="171450"/>
-          </a:xfrm>
-          <a:prstGeom prst="rect">
-            <a:avLst/>
-          </a:prstGeom>
-          <a:noFill/>
-          <a:ln/>
-        </p:spPr>
-        <p:txBody>
-          <a:bodyPr wrap="square" lIns="0" tIns="0" rIns="0" bIns="0" rtlCol="0" anchor="t"/>
-          <a:lstStyle/>
-          <a:p>
-            <a:pPr algn="ctr" indent="0" marL="0">
-              <a:buNone/>
-            </a:pPr>
-            <a:r>
-              <a:rPr lang="en-US" sz="1150" b="1" dirty="0">
-                <a:solidFill>
-                  <a:srgbClr val="FFFFFF"/>
-                </a:solidFill>
-                <a:latin typeface="Arial" pitchFamily="34" charset="0"/>
-                <a:ea typeface="Arial" pitchFamily="34" charset="-122"/>
-                <a:cs typeface="Arial" pitchFamily="34" charset="-120"/>
-              </a:rPr>
-              <a:t>CHAPTER 02</a:t>
-            </a:r>
-            <a:endParaRPr lang="en-US" sz="1150" dirty="0"/>
-          </a:p>
-        </p:txBody>
-      </p:sp>
-      <p:pic>
-        <p:nvPicPr>
-          <p:cNvPr id="5" name="Image 1" descr="Open this chapter on GitHub">
-            <a:hlinkClick r:id="rId3" tooltip="https://github.com/github/copilot-app-for-beginners/tree/main/02-sessions-worktrees-context"/>
-          </p:cNvPr>
-          <p:cNvPicPr>
-            <a:picLocks noChangeAspect="1"/>
-          </p:cNvPicPr>
-          <p:nvPr/>
-        </p:nvPicPr>
-        <p:blipFill>
-          <a:blip r:embed="rId2"/>
-          <a:stretch>
-            <a:fillRect/>
-          </a:stretch>
-        </p:blipFill>
-        <p:spPr>
-          <a:xfrm>
-            <a:off x="8610600" y="165050"/>
-            <a:ext cx="304800" cy="304800"/>
-          </a:xfrm>
-          <a:prstGeom prst="rect">
-            <a:avLst/>
-          </a:prstGeom>
-        </p:spPr>
-      </p:pic>
-      <p:sp>
-        <p:nvSpPr>
-          <p:cNvPr id="6" name="Text 2"/>
-          <p:cNvSpPr/>
-          <p:nvPr/>
-        </p:nvSpPr>
-        <p:spPr>
-          <a:xfrm>
-            <a:off x="507950" y="381000"/>
-            <a:ext cx="8161020" cy="190500"/>
-          </a:xfrm>
-          <a:prstGeom prst="rect">
-            <a:avLst/>
-          </a:prstGeom>
-          <a:noFill/>
-          <a:ln/>
-        </p:spPr>
-        <p:txBody>
-          <a:bodyPr wrap="square" lIns="0" tIns="0" rIns="0" bIns="0" rtlCol="0" anchor="t"/>
-          <a:lstStyle/>
-          <a:p>
-            <a:pPr algn="l" indent="0" marL="0">
-              <a:buNone/>
-            </a:pPr>
-            <a:r>
-              <a:rPr lang="en-US" sz="1250" b="1" dirty="0">
-                <a:solidFill>
-                  <a:srgbClr val="1A7F37"/>
-                </a:solidFill>
-                <a:latin typeface="Arial" pitchFamily="34" charset="0"/>
-                <a:ea typeface="Arial" pitchFamily="34" charset="-122"/>
-                <a:cs typeface="Arial" pitchFamily="34" charset="-120"/>
-              </a:rPr>
-              <a:t>YOUR TURN</a:t>
-            </a:r>
-            <a:endParaRPr lang="en-US" sz="1250" dirty="0"/>
-          </a:p>
-        </p:txBody>
-      </p:sp>
-      <p:sp>
-        <p:nvSpPr>
-          <p:cNvPr id="7" name="Text 3"/>
-          <p:cNvSpPr/>
-          <p:nvPr/>
-        </p:nvSpPr>
-        <p:spPr>
-          <a:xfrm>
-            <a:off x="507950" y="622250"/>
-            <a:ext cx="8161020" cy="419100"/>
-          </a:xfrm>
-          <a:prstGeom prst="rect">
-            <a:avLst/>
-          </a:prstGeom>
-          <a:noFill/>
-          <a:ln/>
-        </p:spPr>
-        <p:txBody>
-          <a:bodyPr wrap="square" lIns="0" tIns="0" rIns="0" bIns="0" rtlCol="0" anchor="t"/>
-          <a:lstStyle/>
-          <a:p>
-            <a:pPr algn="l" indent="0" marL="0">
-              <a:lnSpc>
-                <a:spcPts val="3300"/>
-              </a:lnSpc>
-              <a:spcBef>
-                <a:spcPts val="400"/>
-              </a:spcBef>
-              <a:buNone/>
-            </a:pPr>
-            <a:r>
-              <a:rPr lang="en-US" sz="2800" b="1" dirty="0">
-                <a:solidFill>
-                  <a:srgbClr val="1F2328"/>
-                </a:solidFill>
-                <a:latin typeface="Arial" pitchFamily="34" charset="0"/>
-                <a:ea typeface="Arial" pitchFamily="34" charset="-122"/>
-                <a:cs typeface="Arial" pitchFamily="34" charset="-120"/>
-              </a:rPr>
-              <a:t>Add a light and dark theme</a:t>
-            </a:r>
-            <a:endParaRPr lang="en-US" sz="2800" dirty="0"/>
-          </a:p>
-        </p:txBody>
-      </p:sp>
-      <p:sp>
-        <p:nvSpPr>
-          <p:cNvPr id="8" name="Text 4"/>
-          <p:cNvSpPr/>
-          <p:nvPr/>
-        </p:nvSpPr>
-        <p:spPr>
-          <a:xfrm>
-            <a:off x="507950" y="1104751"/>
-            <a:ext cx="8161020" cy="273100"/>
-          </a:xfrm>
-          <a:prstGeom prst="rect">
-            <a:avLst/>
-          </a:prstGeom>
-          <a:noFill/>
-          <a:ln/>
-        </p:spPr>
-        <p:txBody>
-          <a:bodyPr wrap="square" lIns="0" tIns="0" rIns="0" bIns="0" rtlCol="0" anchor="t"/>
-          <a:lstStyle/>
-          <a:p>
-            <a:pPr algn="l" indent="0" marL="0">
-              <a:lnSpc>
-                <a:spcPts val="2000"/>
-              </a:lnSpc>
-              <a:spcBef>
-                <a:spcPts val="500"/>
-              </a:spcBef>
-              <a:buNone/>
-            </a:pPr>
-            <a:r>
-              <a:rPr lang="en-US" sz="1650" dirty="0">
-                <a:solidFill>
-                  <a:srgbClr val="59636E"/>
-                </a:solidFill>
-                <a:latin typeface="Arial" pitchFamily="34" charset="0"/>
-                <a:ea typeface="Arial" pitchFamily="34" charset="-122"/>
-                <a:cs typeface="Arial" pitchFamily="34" charset="-120"/>
-              </a:rPr>
-              <a:t>Use </a:t>
-            </a:r>
-            <a:pPr algn="l" indent="0" marL="0">
-              <a:lnSpc>
-                <a:spcPts val="2000"/>
-              </a:lnSpc>
-              <a:spcBef>
-                <a:spcPts val="500"/>
-              </a:spcBef>
-              <a:buNone/>
-            </a:pPr>
-            <a:r>
-              <a:rPr lang="en-US" sz="1650" b="1" dirty="0">
-                <a:solidFill>
-                  <a:srgbClr val="0550AE"/>
-                </a:solidFill>
-                <a:latin typeface="Courier New" pitchFamily="34" charset="0"/>
-                <a:ea typeface="Courier New" pitchFamily="34" charset="-122"/>
-                <a:cs typeface="Courier New" pitchFamily="34" charset="-120"/>
-              </a:rPr>
-              <a:t>@</a:t>
-            </a:r>
-            <a:pPr algn="l" indent="0" marL="0">
-              <a:lnSpc>
-                <a:spcPts val="2000"/>
-              </a:lnSpc>
-              <a:spcBef>
-                <a:spcPts val="500"/>
-              </a:spcBef>
-              <a:buNone/>
-            </a:pPr>
-            <a:r>
-              <a:rPr lang="en-US" sz="1650" dirty="0">
-                <a:solidFill>
-                  <a:srgbClr val="59636E"/>
-                </a:solidFill>
-                <a:latin typeface="Arial" pitchFamily="34" charset="0"/>
-                <a:ea typeface="Arial" pitchFamily="34" charset="-122"/>
-                <a:cs typeface="Arial" pitchFamily="34" charset="-120"/>
-              </a:rPr>
-              <a:t> to attach the code this time. Keep the work in its worktree.</a:t>
-            </a:r>
-            <a:endParaRPr lang="en-US" sz="1650" dirty="0"/>
-          </a:p>
-        </p:txBody>
-      </p:sp>
-      <p:sp>
-        <p:nvSpPr>
-          <p:cNvPr id="9" name="Text 5"/>
-          <p:cNvSpPr/>
-          <p:nvPr/>
-        </p:nvSpPr>
-        <p:spPr>
-          <a:xfrm>
-            <a:off x="507950" y="1766143"/>
-            <a:ext cx="5334000" cy="2690515"/>
-          </a:xfrm>
-          <a:prstGeom prst="roundRect">
-            <a:avLst>
-              <a:gd name="adj" fmla="val 4720"/>
-            </a:avLst>
-          </a:prstGeom>
-          <a:solidFill>
-            <a:srgbClr val="FFFFFF"/>
-          </a:solidFill>
-          <a:ln w="9525">
-            <a:solidFill>
-              <a:srgbClr val="FFC49B"/>
-            </a:solidFill>
-          </a:ln>
-        </p:spPr>
-        <p:txBody>
-          <a:bodyPr wrap="square" rtlCol="0" anchor="ctr"/>
-          <a:lstStyle/>
-          <a:p>
-            <a:pPr indent="0" marL="0">
-              <a:buNone/>
-            </a:pPr>
-            <a:endParaRPr lang="en-US" dirty="0"/>
-          </a:p>
-        </p:txBody>
-      </p:sp>
-      <p:sp>
-        <p:nvSpPr>
-          <p:cNvPr id="10" name="Shape 6"/>
-          <p:cNvSpPr/>
-          <p:nvPr/>
-        </p:nvSpPr>
-        <p:spPr>
-          <a:xfrm>
-            <a:off x="517475" y="2461171"/>
-            <a:ext cx="5314950" cy="0"/>
-          </a:xfrm>
-          <a:prstGeom prst="line">
-            <a:avLst/>
-          </a:prstGeom>
-          <a:noFill/>
-          <a:ln w="9525">
-            <a:solidFill>
-              <a:srgbClr val="D1D9E0"/>
-            </a:solidFill>
-            <a:prstDash val="solid"/>
-          </a:ln>
-        </p:spPr>
-      </p:sp>
-      <p:sp>
-        <p:nvSpPr>
-          <p:cNvPr id="11" name="Text 7"/>
-          <p:cNvSpPr/>
-          <p:nvPr/>
-        </p:nvSpPr>
-        <p:spPr>
-          <a:xfrm>
-            <a:off x="695176" y="1976289"/>
-            <a:ext cx="279350" cy="279350"/>
-          </a:xfrm>
-          <a:prstGeom prst="roundRect">
-            <a:avLst>
-              <a:gd name="adj" fmla="val 327331"/>
-            </a:avLst>
-          </a:prstGeom>
-          <a:solidFill>
-            <a:srgbClr val="BC4C00"/>
-          </a:solidFill>
-          <a:ln/>
-        </p:spPr>
-        <p:txBody>
-          <a:bodyPr wrap="square" rtlCol="0" anchor="ctr"/>
-          <a:lstStyle/>
-          <a:p>
-            <a:pPr indent="0" marL="0">
-              <a:buNone/>
-            </a:pPr>
-            <a:endParaRPr lang="en-US" dirty="0"/>
-          </a:p>
-        </p:txBody>
-      </p:sp>
-      <p:sp>
-        <p:nvSpPr>
-          <p:cNvPr id="12" name="Text 8"/>
-          <p:cNvSpPr/>
-          <p:nvPr/>
-        </p:nvSpPr>
-        <p:spPr>
-          <a:xfrm>
-            <a:off x="789841" y="2020639"/>
-            <a:ext cx="90020" cy="190500"/>
-          </a:xfrm>
-          <a:prstGeom prst="rect">
-            <a:avLst/>
-          </a:prstGeom>
-          <a:noFill/>
-          <a:ln/>
-        </p:spPr>
-        <p:txBody>
-          <a:bodyPr wrap="square" lIns="0" tIns="0" rIns="0" bIns="0" rtlCol="0" anchor="t"/>
-          <a:lstStyle/>
-          <a:p>
-            <a:pPr algn="ctr" indent="0" marL="0">
-              <a:buNone/>
-            </a:pPr>
-            <a:r>
-              <a:rPr lang="en-US" sz="1250" b="1" dirty="0">
-                <a:solidFill>
-                  <a:srgbClr val="FFFFFF"/>
-                </a:solidFill>
-                <a:latin typeface="Arial" pitchFamily="34" charset="0"/>
-                <a:ea typeface="Arial" pitchFamily="34" charset="-122"/>
-                <a:cs typeface="Arial" pitchFamily="34" charset="-120"/>
-              </a:rPr>
-              <a:t>1</a:t>
-            </a:r>
-            <a:endParaRPr lang="en-US" sz="1250" dirty="0"/>
-          </a:p>
-        </p:txBody>
-      </p:sp>
-      <p:sp>
-        <p:nvSpPr>
-          <p:cNvPr id="13" name="Text 9"/>
-          <p:cNvSpPr/>
-          <p:nvPr/>
-        </p:nvSpPr>
-        <p:spPr>
-          <a:xfrm>
-            <a:off x="1152227" y="2008733"/>
-            <a:ext cx="1943100" cy="214610"/>
-          </a:xfrm>
-          <a:prstGeom prst="rect">
-            <a:avLst/>
-          </a:prstGeom>
-          <a:noFill/>
-          <a:ln/>
-        </p:spPr>
-        <p:txBody>
-          <a:bodyPr wrap="square" lIns="0" tIns="0" rIns="0" bIns="0" rtlCol="0" anchor="t"/>
-          <a:lstStyle/>
-          <a:p>
-            <a:pPr algn="l" indent="0" marL="0">
-              <a:lnSpc>
-                <a:spcPts val="1690"/>
-              </a:lnSpc>
-              <a:buNone/>
-            </a:pPr>
-            <a:r>
-              <a:rPr lang="en-US" sz="1500" b="1" dirty="0">
-                <a:solidFill>
-                  <a:srgbClr val="1F2328"/>
-                </a:solidFill>
-                <a:latin typeface="Arial" pitchFamily="34" charset="0"/>
-                <a:ea typeface="Arial" pitchFamily="34" charset="-122"/>
-                <a:cs typeface="Arial" pitchFamily="34" charset="-120"/>
-              </a:rPr>
-              <a:t>Start from main</a:t>
-            </a:r>
-            <a:endParaRPr lang="en-US" sz="1500" dirty="0"/>
-          </a:p>
-        </p:txBody>
-      </p:sp>
-      <p:sp>
-        <p:nvSpPr>
-          <p:cNvPr id="14" name="Text 10"/>
-          <p:cNvSpPr/>
-          <p:nvPr/>
-        </p:nvSpPr>
-        <p:spPr>
-          <a:xfrm>
-            <a:off x="3234928" y="1889968"/>
-            <a:ext cx="2468192" cy="452140"/>
-          </a:xfrm>
-          <a:prstGeom prst="rect">
-            <a:avLst/>
-          </a:prstGeom>
-          <a:noFill/>
-          <a:ln/>
-        </p:spPr>
-        <p:txBody>
-          <a:bodyPr wrap="square" lIns="0" tIns="0" rIns="0" bIns="0" rtlCol="0" anchor="t"/>
-          <a:lstStyle/>
-          <a:p>
-            <a:pPr algn="l" indent="0" marL="0">
-              <a:lnSpc>
-                <a:spcPts val="1630"/>
-              </a:lnSpc>
-              <a:buNone/>
-            </a:pPr>
-            <a:r>
-              <a:rPr lang="en-US" sz="1400" b="1" dirty="0">
-                <a:solidFill>
-                  <a:srgbClr val="59636E"/>
-                </a:solidFill>
-                <a:latin typeface="Arial" pitchFamily="34" charset="0"/>
-                <a:ea typeface="Arial" pitchFamily="34" charset="-122"/>
-                <a:cs typeface="Arial" pitchFamily="34" charset="-120"/>
-              </a:rPr>
-              <a:t>Create from</a:t>
-            </a:r>
-            <a:pPr algn="l" indent="0" marL="0">
-              <a:lnSpc>
-                <a:spcPts val="1630"/>
-              </a:lnSpc>
-              <a:buNone/>
-            </a:pPr>
-            <a:r>
-              <a:rPr lang="en-US" sz="1400" dirty="0">
-                <a:solidFill>
-                  <a:srgbClr val="59636E"/>
-                </a:solidFill>
-                <a:latin typeface="Arial" pitchFamily="34" charset="0"/>
-                <a:ea typeface="Arial" pitchFamily="34" charset="-122"/>
-                <a:cs typeface="Arial" pitchFamily="34" charset="-120"/>
-              </a:rPr>
-              <a:t> </a:t>
-            </a:r>
-            <a:pPr algn="l" indent="0" marL="0">
-              <a:lnSpc>
-                <a:spcPts val="1630"/>
-              </a:lnSpc>
-              <a:buNone/>
-            </a:pPr>
-            <a:r>
-              <a:rPr lang="en-US" sz="1400" b="1" dirty="0">
-                <a:solidFill>
-                  <a:srgbClr val="0550AE"/>
-                </a:solidFill>
-                <a:latin typeface="Courier New" pitchFamily="34" charset="0"/>
-                <a:ea typeface="Courier New" pitchFamily="34" charset="-122"/>
-                <a:cs typeface="Courier New" pitchFamily="34" charset="-120"/>
-              </a:rPr>
-              <a:t>main</a:t>
-            </a:r>
-            <a:pPr algn="l" indent="0" marL="0">
-              <a:lnSpc>
-                <a:spcPts val="1630"/>
-              </a:lnSpc>
-              <a:buNone/>
-            </a:pPr>
-            <a:r>
-              <a:rPr lang="en-US" sz="1400" dirty="0">
-                <a:solidFill>
-                  <a:srgbClr val="59636E"/>
-                </a:solidFill>
-                <a:latin typeface="Arial" pitchFamily="34" charset="0"/>
-                <a:ea typeface="Arial" pitchFamily="34" charset="-122"/>
-                <a:cs typeface="Arial" pitchFamily="34" charset="-120"/>
-              </a:rPr>
-              <a:t>. Check </a:t>
-            </a:r>
-            <a:pPr algn="l" indent="0" marL="0">
-              <a:lnSpc>
-                <a:spcPts val="1630"/>
-              </a:lnSpc>
-              <a:buNone/>
-            </a:pPr>
-            <a:r>
-              <a:rPr lang="en-US" sz="1400" b="1" dirty="0">
-                <a:solidFill>
-                  <a:srgbClr val="0550AE"/>
-                </a:solidFill>
-                <a:latin typeface="Courier New" pitchFamily="34" charset="0"/>
-                <a:ea typeface="Courier New" pitchFamily="34" charset="-122"/>
-                <a:cs typeface="Courier New" pitchFamily="34" charset="-120"/>
-              </a:rPr>
-              <a:t>/context</a:t>
-            </a:r>
-            <a:pPr algn="l" indent="0" marL="0">
-              <a:lnSpc>
-                <a:spcPts val="1630"/>
-              </a:lnSpc>
-              <a:buNone/>
-            </a:pPr>
-            <a:r>
-              <a:rPr lang="en-US" sz="1400" dirty="0">
-                <a:solidFill>
-                  <a:srgbClr val="59636E"/>
-                </a:solidFill>
-                <a:latin typeface="Arial" pitchFamily="34" charset="0"/>
-                <a:ea typeface="Arial" pitchFamily="34" charset="-122"/>
-                <a:cs typeface="Arial" pitchFamily="34" charset="-120"/>
-              </a:rPr>
-              <a:t>.</a:t>
-            </a:r>
-            <a:endParaRPr lang="en-US" sz="1400" dirty="0"/>
-          </a:p>
-        </p:txBody>
-      </p:sp>
-      <p:sp>
-        <p:nvSpPr>
-          <p:cNvPr id="15" name="Shape 11"/>
-          <p:cNvSpPr/>
-          <p:nvPr/>
-        </p:nvSpPr>
-        <p:spPr>
-          <a:xfrm>
-            <a:off x="517475" y="3113336"/>
-            <a:ext cx="5314950" cy="0"/>
-          </a:xfrm>
-          <a:prstGeom prst="line">
-            <a:avLst/>
-          </a:prstGeom>
-          <a:noFill/>
-          <a:ln w="9525">
-            <a:solidFill>
-              <a:srgbClr val="D1D9E0"/>
-            </a:solidFill>
-            <a:prstDash val="solid"/>
-          </a:ln>
-        </p:spPr>
-      </p:sp>
-      <p:sp>
-        <p:nvSpPr>
-          <p:cNvPr id="16" name="Text 12"/>
-          <p:cNvSpPr/>
-          <p:nvPr/>
-        </p:nvSpPr>
-        <p:spPr>
-          <a:xfrm>
-            <a:off x="695176" y="2647504"/>
-            <a:ext cx="279350" cy="279350"/>
-          </a:xfrm>
-          <a:prstGeom prst="roundRect">
-            <a:avLst>
-              <a:gd name="adj" fmla="val 327331"/>
-            </a:avLst>
-          </a:prstGeom>
-          <a:solidFill>
-            <a:srgbClr val="BC4C00"/>
-          </a:solidFill>
-          <a:ln/>
-        </p:spPr>
-        <p:txBody>
-          <a:bodyPr wrap="square" rtlCol="0" anchor="ctr"/>
-          <a:lstStyle/>
-          <a:p>
-            <a:pPr indent="0" marL="0">
-              <a:buNone/>
-            </a:pPr>
-            <a:endParaRPr lang="en-US" dirty="0"/>
-          </a:p>
-        </p:txBody>
-      </p:sp>
-      <p:sp>
-        <p:nvSpPr>
-          <p:cNvPr id="17" name="Text 13"/>
-          <p:cNvSpPr/>
-          <p:nvPr/>
-        </p:nvSpPr>
-        <p:spPr>
-          <a:xfrm>
-            <a:off x="789841" y="2691854"/>
-            <a:ext cx="90020" cy="190500"/>
-          </a:xfrm>
-          <a:prstGeom prst="rect">
-            <a:avLst/>
-          </a:prstGeom>
-          <a:noFill/>
-          <a:ln/>
-        </p:spPr>
-        <p:txBody>
-          <a:bodyPr wrap="square" lIns="0" tIns="0" rIns="0" bIns="0" rtlCol="0" anchor="t"/>
-          <a:lstStyle/>
-          <a:p>
-            <a:pPr algn="ctr" indent="0" marL="0">
-              <a:buNone/>
-            </a:pPr>
-            <a:r>
-              <a:rPr lang="en-US" sz="1250" b="1" dirty="0">
-                <a:solidFill>
-                  <a:srgbClr val="FFFFFF"/>
-                </a:solidFill>
-                <a:latin typeface="Arial" pitchFamily="34" charset="0"/>
-                <a:ea typeface="Arial" pitchFamily="34" charset="-122"/>
-                <a:cs typeface="Arial" pitchFamily="34" charset="-120"/>
-              </a:rPr>
-              <a:t>2</a:t>
-            </a:r>
-            <a:endParaRPr lang="en-US" sz="1250" dirty="0"/>
-          </a:p>
-        </p:txBody>
-      </p:sp>
-      <p:sp>
-        <p:nvSpPr>
-          <p:cNvPr id="18" name="Text 14"/>
-          <p:cNvSpPr/>
-          <p:nvPr/>
-        </p:nvSpPr>
-        <p:spPr>
-          <a:xfrm>
-            <a:off x="1152227" y="2679948"/>
-            <a:ext cx="1943100" cy="214610"/>
-          </a:xfrm>
-          <a:prstGeom prst="rect">
-            <a:avLst/>
-          </a:prstGeom>
-          <a:noFill/>
-          <a:ln/>
-        </p:spPr>
-        <p:txBody>
-          <a:bodyPr wrap="square" lIns="0" tIns="0" rIns="0" bIns="0" rtlCol="0" anchor="t"/>
-          <a:lstStyle/>
-          <a:p>
-            <a:pPr algn="l" indent="0" marL="0">
-              <a:lnSpc>
-                <a:spcPts val="1690"/>
-              </a:lnSpc>
-              <a:buNone/>
-            </a:pPr>
-            <a:r>
-              <a:rPr lang="en-US" sz="1500" b="1" dirty="0">
-                <a:solidFill>
-                  <a:srgbClr val="1F2328"/>
-                </a:solidFill>
-                <a:latin typeface="Arial" pitchFamily="34" charset="0"/>
-                <a:ea typeface="Arial" pitchFamily="34" charset="-122"/>
-                <a:cs typeface="Arial" pitchFamily="34" charset="-120"/>
-              </a:rPr>
-              <a:t>Plan with @src</a:t>
-            </a:r>
-            <a:endParaRPr lang="en-US" sz="1500" dirty="0"/>
-          </a:p>
-        </p:txBody>
-      </p:sp>
-      <p:sp>
-        <p:nvSpPr>
-          <p:cNvPr id="19" name="Text 15"/>
-          <p:cNvSpPr/>
-          <p:nvPr/>
-        </p:nvSpPr>
-        <p:spPr>
-          <a:xfrm>
-            <a:off x="3234928" y="2580233"/>
-            <a:ext cx="2468192" cy="414040"/>
-          </a:xfrm>
-          <a:prstGeom prst="rect">
-            <a:avLst/>
-          </a:prstGeom>
-          <a:noFill/>
-          <a:ln/>
-        </p:spPr>
-        <p:txBody>
-          <a:bodyPr wrap="square" lIns="0" tIns="0" rIns="0" bIns="0" rtlCol="0" anchor="t"/>
-          <a:lstStyle/>
-          <a:p>
-            <a:pPr algn="l" indent="0" marL="0">
-              <a:lnSpc>
-                <a:spcPts val="1630"/>
-              </a:lnSpc>
-              <a:buNone/>
-            </a:pPr>
-            <a:r>
-              <a:rPr lang="en-US" sz="1400" dirty="0">
-                <a:solidFill>
-                  <a:srgbClr val="59636E"/>
-                </a:solidFill>
-                <a:latin typeface="Arial" pitchFamily="34" charset="0"/>
-                <a:ea typeface="Arial" pitchFamily="34" charset="-122"/>
-                <a:cs typeface="Arial" pitchFamily="34" charset="-120"/>
-              </a:rPr>
-              <a:t>Accessible toggle, readable in both themes.</a:t>
-            </a:r>
-            <a:endParaRPr lang="en-US" sz="1400" dirty="0"/>
-          </a:p>
-        </p:txBody>
-      </p:sp>
-      <p:sp>
-        <p:nvSpPr>
-          <p:cNvPr id="20" name="Shape 16"/>
-          <p:cNvSpPr/>
-          <p:nvPr/>
-        </p:nvSpPr>
-        <p:spPr>
-          <a:xfrm>
-            <a:off x="517475" y="3780681"/>
-            <a:ext cx="5314950" cy="0"/>
-          </a:xfrm>
-          <a:prstGeom prst="line">
-            <a:avLst/>
-          </a:prstGeom>
-          <a:noFill/>
-          <a:ln w="9525">
-            <a:solidFill>
-              <a:srgbClr val="D1D9E0"/>
-            </a:solidFill>
-            <a:prstDash val="solid"/>
-          </a:ln>
-        </p:spPr>
-      </p:sp>
-      <p:sp>
-        <p:nvSpPr>
-          <p:cNvPr id="21" name="Text 17"/>
-          <p:cNvSpPr/>
-          <p:nvPr/>
-        </p:nvSpPr>
-        <p:spPr>
-          <a:xfrm>
-            <a:off x="695176" y="3307259"/>
-            <a:ext cx="279350" cy="279350"/>
-          </a:xfrm>
-          <a:prstGeom prst="roundRect">
-            <a:avLst>
-              <a:gd name="adj" fmla="val 327331"/>
-            </a:avLst>
-          </a:prstGeom>
-          <a:solidFill>
-            <a:srgbClr val="BC4C00"/>
-          </a:solidFill>
-          <a:ln/>
-        </p:spPr>
-        <p:txBody>
-          <a:bodyPr wrap="square" rtlCol="0" anchor="ctr"/>
-          <a:lstStyle/>
-          <a:p>
-            <a:pPr indent="0" marL="0">
-              <a:buNone/>
-            </a:pPr>
-            <a:endParaRPr lang="en-US" dirty="0"/>
-          </a:p>
-        </p:txBody>
-      </p:sp>
-      <p:sp>
-        <p:nvSpPr>
-          <p:cNvPr id="22" name="Text 18"/>
-          <p:cNvSpPr/>
-          <p:nvPr/>
-        </p:nvSpPr>
-        <p:spPr>
-          <a:xfrm>
-            <a:off x="789841" y="3351609"/>
-            <a:ext cx="90020" cy="190500"/>
-          </a:xfrm>
-          <a:prstGeom prst="rect">
-            <a:avLst/>
-          </a:prstGeom>
-          <a:noFill/>
-          <a:ln/>
-        </p:spPr>
-        <p:txBody>
-          <a:bodyPr wrap="square" lIns="0" tIns="0" rIns="0" bIns="0" rtlCol="0" anchor="t"/>
-          <a:lstStyle/>
-          <a:p>
-            <a:pPr algn="ctr" indent="0" marL="0">
-              <a:buNone/>
-            </a:pPr>
-            <a:r>
-              <a:rPr lang="en-US" sz="1250" b="1" dirty="0">
-                <a:solidFill>
-                  <a:srgbClr val="FFFFFF"/>
-                </a:solidFill>
-                <a:latin typeface="Arial" pitchFamily="34" charset="0"/>
-                <a:ea typeface="Arial" pitchFamily="34" charset="-122"/>
-                <a:cs typeface="Arial" pitchFamily="34" charset="-120"/>
-              </a:rPr>
-              <a:t>3</a:t>
-            </a:r>
-            <a:endParaRPr lang="en-US" sz="1250" dirty="0"/>
-          </a:p>
-        </p:txBody>
-      </p:sp>
-      <p:sp>
-        <p:nvSpPr>
-          <p:cNvPr id="23" name="Text 19"/>
-          <p:cNvSpPr/>
-          <p:nvPr/>
-        </p:nvSpPr>
-        <p:spPr>
-          <a:xfrm>
-            <a:off x="1152227" y="3232398"/>
-            <a:ext cx="1943100" cy="429220"/>
-          </a:xfrm>
-          <a:prstGeom prst="rect">
-            <a:avLst/>
-          </a:prstGeom>
-          <a:noFill/>
-          <a:ln/>
-        </p:spPr>
-        <p:txBody>
-          <a:bodyPr wrap="square" lIns="0" tIns="0" rIns="0" bIns="0" rtlCol="0" anchor="t"/>
-          <a:lstStyle/>
-          <a:p>
-            <a:pPr algn="l" indent="0" marL="0">
-              <a:lnSpc>
-                <a:spcPts val="1690"/>
-              </a:lnSpc>
-              <a:buNone/>
-            </a:pPr>
-            <a:r>
-              <a:rPr lang="en-US" sz="1500" b="1" dirty="0">
-                <a:solidFill>
-                  <a:srgbClr val="1F2328"/>
-                </a:solidFill>
-                <a:latin typeface="Arial" pitchFamily="34" charset="0"/>
-                <a:ea typeface="Arial" pitchFamily="34" charset="-122"/>
-                <a:cs typeface="Arial" pitchFamily="34" charset="-120"/>
-              </a:rPr>
-              <a:t>Implement and inspect</a:t>
-            </a:r>
-            <a:endParaRPr lang="en-US" sz="1500" dirty="0"/>
-          </a:p>
-        </p:txBody>
-      </p:sp>
-      <p:sp>
-        <p:nvSpPr>
-          <p:cNvPr id="24" name="Text 20"/>
-          <p:cNvSpPr/>
-          <p:nvPr/>
-        </p:nvSpPr>
-        <p:spPr>
-          <a:xfrm>
-            <a:off x="3234928" y="3239988"/>
-            <a:ext cx="2468192" cy="414040"/>
-          </a:xfrm>
-          <a:prstGeom prst="rect">
-            <a:avLst/>
-          </a:prstGeom>
-          <a:noFill/>
-          <a:ln/>
-        </p:spPr>
-        <p:txBody>
-          <a:bodyPr wrap="square" lIns="0" tIns="0" rIns="0" bIns="0" rtlCol="0" anchor="t"/>
-          <a:lstStyle/>
-          <a:p>
-            <a:pPr algn="l" indent="0" marL="0">
-              <a:lnSpc>
-                <a:spcPts val="1630"/>
-              </a:lnSpc>
-              <a:buNone/>
-            </a:pPr>
-            <a:r>
-              <a:rPr lang="en-US" sz="1400" dirty="0">
-                <a:solidFill>
-                  <a:srgbClr val="59636E"/>
-                </a:solidFill>
-                <a:latin typeface="Arial" pitchFamily="34" charset="0"/>
-                <a:ea typeface="Arial" pitchFamily="34" charset="-122"/>
-                <a:cs typeface="Arial" pitchFamily="34" charset="-120"/>
-              </a:rPr>
-              <a:t>Check the diff and both themes.</a:t>
-            </a:r>
-            <a:endParaRPr lang="en-US" sz="1400" dirty="0"/>
-          </a:p>
-        </p:txBody>
-      </p:sp>
-      <p:sp>
-        <p:nvSpPr>
-          <p:cNvPr id="25" name="Text 21"/>
-          <p:cNvSpPr/>
-          <p:nvPr/>
-        </p:nvSpPr>
-        <p:spPr>
-          <a:xfrm>
-            <a:off x="695176" y="3976539"/>
-            <a:ext cx="279350" cy="279350"/>
-          </a:xfrm>
-          <a:prstGeom prst="roundRect">
-            <a:avLst>
-              <a:gd name="adj" fmla="val 327331"/>
-            </a:avLst>
-          </a:prstGeom>
-          <a:solidFill>
-            <a:srgbClr val="BC4C00"/>
-          </a:solidFill>
-          <a:ln/>
-        </p:spPr>
-        <p:txBody>
-          <a:bodyPr wrap="square" rtlCol="0" anchor="ctr"/>
-          <a:lstStyle/>
-          <a:p>
-            <a:pPr indent="0" marL="0">
-              <a:buNone/>
-            </a:pPr>
-            <a:endParaRPr lang="en-US" dirty="0"/>
-          </a:p>
-        </p:txBody>
-      </p:sp>
-      <p:sp>
-        <p:nvSpPr>
-          <p:cNvPr id="26" name="Text 22"/>
-          <p:cNvSpPr/>
-          <p:nvPr/>
-        </p:nvSpPr>
-        <p:spPr>
-          <a:xfrm>
-            <a:off x="789841" y="4020889"/>
-            <a:ext cx="90020" cy="190500"/>
-          </a:xfrm>
-          <a:prstGeom prst="rect">
-            <a:avLst/>
-          </a:prstGeom>
-          <a:noFill/>
-          <a:ln/>
-        </p:spPr>
-        <p:txBody>
-          <a:bodyPr wrap="square" lIns="0" tIns="0" rIns="0" bIns="0" rtlCol="0" anchor="t"/>
-          <a:lstStyle/>
-          <a:p>
-            <a:pPr algn="ctr" indent="0" marL="0">
-              <a:buNone/>
-            </a:pPr>
-            <a:r>
-              <a:rPr lang="en-US" sz="1250" b="1" dirty="0">
-                <a:solidFill>
-                  <a:srgbClr val="FFFFFF"/>
-                </a:solidFill>
-                <a:latin typeface="Arial" pitchFamily="34" charset="0"/>
-                <a:ea typeface="Arial" pitchFamily="34" charset="-122"/>
-                <a:cs typeface="Arial" pitchFamily="34" charset="-120"/>
-              </a:rPr>
-              <a:t>4</a:t>
-            </a:r>
-            <a:endParaRPr lang="en-US" sz="1250" dirty="0"/>
-          </a:p>
-        </p:txBody>
-      </p:sp>
-      <p:sp>
-        <p:nvSpPr>
-          <p:cNvPr id="27" name="Text 23"/>
-          <p:cNvSpPr/>
-          <p:nvPr/>
-        </p:nvSpPr>
-        <p:spPr>
-          <a:xfrm>
-            <a:off x="1152227" y="4008983"/>
-            <a:ext cx="1943100" cy="214610"/>
-          </a:xfrm>
-          <a:prstGeom prst="rect">
-            <a:avLst/>
-          </a:prstGeom>
-          <a:noFill/>
-          <a:ln/>
-        </p:spPr>
-        <p:txBody>
-          <a:bodyPr wrap="square" lIns="0" tIns="0" rIns="0" bIns="0" rtlCol="0" anchor="t"/>
-          <a:lstStyle/>
-          <a:p>
-            <a:pPr algn="l" indent="0" marL="0">
-              <a:lnSpc>
-                <a:spcPts val="1690"/>
-              </a:lnSpc>
-              <a:buNone/>
-            </a:pPr>
-            <a:r>
-              <a:rPr lang="en-US" sz="1500" b="1" dirty="0">
-                <a:solidFill>
-                  <a:srgbClr val="1F2328"/>
-                </a:solidFill>
-                <a:latin typeface="Arial" pitchFamily="34" charset="0"/>
-                <a:ea typeface="Arial" pitchFamily="34" charset="-122"/>
-                <a:cs typeface="Arial" pitchFamily="34" charset="-120"/>
-              </a:rPr>
-              <a:t>Validate and recap</a:t>
-            </a:r>
-            <a:endParaRPr lang="en-US" sz="1500" dirty="0"/>
-          </a:p>
-        </p:txBody>
-      </p:sp>
-      <p:sp>
-        <p:nvSpPr>
-          <p:cNvPr id="28" name="Text 24"/>
-          <p:cNvSpPr/>
-          <p:nvPr/>
-        </p:nvSpPr>
-        <p:spPr>
-          <a:xfrm>
-            <a:off x="3234928" y="3899743"/>
-            <a:ext cx="2468192" cy="433090"/>
-          </a:xfrm>
-          <a:prstGeom prst="rect">
-            <a:avLst/>
-          </a:prstGeom>
-          <a:noFill/>
-          <a:ln/>
-        </p:spPr>
-        <p:txBody>
-          <a:bodyPr wrap="square" lIns="0" tIns="0" rIns="0" bIns="0" rtlCol="0" anchor="t"/>
-          <a:lstStyle/>
-          <a:p>
-            <a:pPr algn="l" indent="0" marL="0">
-              <a:lnSpc>
-                <a:spcPts val="1630"/>
-              </a:lnSpc>
-              <a:buNone/>
-            </a:pPr>
-            <a:r>
-              <a:rPr lang="en-US" sz="1400" dirty="0">
-                <a:solidFill>
-                  <a:srgbClr val="59636E"/>
-                </a:solidFill>
-                <a:latin typeface="Arial" pitchFamily="34" charset="0"/>
-                <a:ea typeface="Arial" pitchFamily="34" charset="-122"/>
-                <a:cs typeface="Arial" pitchFamily="34" charset="-120"/>
-              </a:rPr>
-              <a:t>Tests, build, then </a:t>
-            </a:r>
-            <a:pPr algn="l" indent="0" marL="0">
-              <a:lnSpc>
-                <a:spcPts val="1630"/>
-              </a:lnSpc>
-              <a:buNone/>
-            </a:pPr>
-            <a:r>
-              <a:rPr lang="en-US" sz="1400" b="1" dirty="0">
-                <a:solidFill>
-                  <a:srgbClr val="0550AE"/>
-                </a:solidFill>
-                <a:latin typeface="Courier New" pitchFamily="34" charset="0"/>
-                <a:ea typeface="Courier New" pitchFamily="34" charset="-122"/>
-                <a:cs typeface="Courier New" pitchFamily="34" charset="-120"/>
-              </a:rPr>
-              <a:t>/chronicle standup</a:t>
-            </a:r>
-            <a:pPr algn="l" indent="0" marL="0">
-              <a:lnSpc>
-                <a:spcPts val="1630"/>
-              </a:lnSpc>
-              <a:buNone/>
-            </a:pPr>
-            <a:r>
-              <a:rPr lang="en-US" sz="1400" dirty="0">
-                <a:solidFill>
-                  <a:srgbClr val="59636E"/>
-                </a:solidFill>
-                <a:latin typeface="Arial" pitchFamily="34" charset="0"/>
-                <a:ea typeface="Arial" pitchFamily="34" charset="-122"/>
-                <a:cs typeface="Arial" pitchFamily="34" charset="-120"/>
-              </a:rPr>
-              <a:t>.</a:t>
-            </a:r>
-            <a:endParaRPr lang="en-US" sz="1400" dirty="0"/>
-          </a:p>
-        </p:txBody>
-      </p:sp>
-      <p:sp>
-        <p:nvSpPr>
-          <p:cNvPr id="29" name="Text 25"/>
-          <p:cNvSpPr/>
-          <p:nvPr/>
-        </p:nvSpPr>
-        <p:spPr>
-          <a:xfrm>
-            <a:off x="6045101" y="1766143"/>
-            <a:ext cx="2590800" cy="2690515"/>
-          </a:xfrm>
-          <a:prstGeom prst="roundRect">
-            <a:avLst>
-              <a:gd name="adj" fmla="val 4902"/>
-            </a:avLst>
-          </a:prstGeom>
-          <a:solidFill>
-            <a:srgbClr val="FFFFFF"/>
-          </a:solidFill>
-          <a:ln w="9525">
-            <a:solidFill>
-              <a:srgbClr val="FFC49B"/>
-            </a:solidFill>
-          </a:ln>
-        </p:spPr>
-        <p:txBody>
-          <a:bodyPr wrap="square" rtlCol="0" anchor="ctr"/>
-          <a:lstStyle/>
-          <a:p>
-            <a:pPr indent="0" marL="0">
-              <a:buNone/>
-            </a:pPr>
-            <a:endParaRPr lang="en-US" dirty="0"/>
-          </a:p>
-        </p:txBody>
-      </p:sp>
-      <p:sp>
-        <p:nvSpPr>
-          <p:cNvPr id="30" name="Text 26"/>
-          <p:cNvSpPr/>
-          <p:nvPr/>
-        </p:nvSpPr>
-        <p:spPr>
-          <a:xfrm>
-            <a:off x="6232327" y="1953369"/>
-            <a:ext cx="381000" cy="381000"/>
-          </a:xfrm>
-          <a:prstGeom prst="roundRect">
-            <a:avLst>
-              <a:gd name="adj" fmla="val 23333"/>
-            </a:avLst>
-          </a:prstGeom>
-          <a:solidFill>
-            <a:srgbClr val="FFF1E5"/>
-          </a:solidFill>
-          <a:ln/>
-        </p:spPr>
-        <p:txBody>
-          <a:bodyPr wrap="square" rtlCol="0" anchor="ctr"/>
-          <a:lstStyle/>
-          <a:p>
-            <a:pPr indent="0" marL="0">
-              <a:buNone/>
-            </a:pPr>
-            <a:endParaRPr lang="en-US" dirty="0"/>
-          </a:p>
-        </p:txBody>
-      </p:sp>
-      <p:pic>
-        <p:nvPicPr>
-          <p:cNvPr id="31" name="Image 2" descr="">
-            <a:extLst>
-              <a:ext uri="{C183D7F6-B498-43B3-948B-1728B52AA6E4}">
-                <adec:decorative xmlns:adec="http://schemas.microsoft.com/office/drawing/2017/decorative" val="1"/>
-              </a:ext>
-            </a:extLst>
-          </p:cNvPr>
-          <p:cNvPicPr>
-            <a:picLocks noChangeAspect="1"/>
-          </p:cNvPicPr>
-          <p:nvPr/>
-        </p:nvPicPr>
-        <p:blipFill>
-          <a:blip r:embed="rId4"/>
-          <a:stretch>
-            <a:fillRect/>
-          </a:stretch>
-        </p:blipFill>
-        <p:spPr>
-          <a:xfrm>
-            <a:off x="6314926" y="2035969"/>
-            <a:ext cx="215801" cy="215801"/>
-          </a:xfrm>
-          <a:prstGeom prst="rect">
-            <a:avLst/>
-          </a:prstGeom>
-        </p:spPr>
-      </p:pic>
-      <p:sp>
-        <p:nvSpPr>
-          <p:cNvPr id="32" name="Text 27"/>
-          <p:cNvSpPr/>
-          <p:nvPr/>
-        </p:nvSpPr>
-        <p:spPr>
-          <a:xfrm>
-            <a:off x="6727627" y="2029569"/>
-            <a:ext cx="867564" cy="228600"/>
-          </a:xfrm>
-          <a:prstGeom prst="rect">
-            <a:avLst/>
-          </a:prstGeom>
-          <a:noFill/>
-          <a:ln/>
-        </p:spPr>
-        <p:txBody>
-          <a:bodyPr wrap="square" lIns="0" tIns="0" rIns="0" bIns="0" rtlCol="0" anchor="t"/>
-          <a:lstStyle/>
-          <a:p>
-            <a:pPr algn="l" indent="0" marL="0">
-              <a:lnSpc>
-                <a:spcPts val="1800"/>
-              </a:lnSpc>
-              <a:buNone/>
-            </a:pPr>
-            <a:r>
-              <a:rPr lang="en-US" sz="1650" b="1" dirty="0">
-                <a:solidFill>
-                  <a:srgbClr val="1F2328"/>
-                </a:solidFill>
-                <a:latin typeface="Arial" pitchFamily="34" charset="0"/>
-                <a:ea typeface="Arial" pitchFamily="34" charset="-122"/>
-                <a:cs typeface="Arial" pitchFamily="34" charset="-120"/>
-              </a:rPr>
-              <a:t>Success</a:t>
-            </a:r>
-            <a:endParaRPr lang="en-US" sz="1650" dirty="0"/>
-          </a:p>
-        </p:txBody>
-      </p:sp>
-      <p:sp>
-        <p:nvSpPr>
-          <p:cNvPr id="33" name="Text 28"/>
-          <p:cNvSpPr/>
-          <p:nvPr/>
-        </p:nvSpPr>
-        <p:spPr>
-          <a:xfrm>
-            <a:off x="6232327" y="2410569"/>
-            <a:ext cx="2260675" cy="867966"/>
-          </a:xfrm>
-          <a:prstGeom prst="rect">
-            <a:avLst/>
-          </a:prstGeom>
-          <a:noFill/>
-          <a:ln/>
-        </p:spPr>
-        <p:txBody>
-          <a:bodyPr wrap="square" lIns="0" tIns="0" rIns="0" bIns="0" rtlCol="0" anchor="t"/>
-          <a:lstStyle/>
-          <a:p>
-            <a:pPr algn="l" indent="0" marL="0">
-              <a:lnSpc>
-                <a:spcPts val="1690"/>
-              </a:lnSpc>
-              <a:buNone/>
-            </a:pPr>
-            <a:r>
-              <a:rPr lang="en-US" sz="1400" dirty="0">
-                <a:solidFill>
-                  <a:srgbClr val="59636E"/>
-                </a:solidFill>
-                <a:latin typeface="Arial" pitchFamily="34" charset="0"/>
-                <a:ea typeface="Arial" pitchFamily="34" charset="-122"/>
-                <a:cs typeface="Arial" pitchFamily="34" charset="-120"/>
-              </a:rPr>
-              <a:t>You can name the branch, the context you attached, and your evidence. </a:t>
-            </a:r>
-            <a:pPr algn="l" indent="0" marL="0">
-              <a:lnSpc>
-                <a:spcPts val="1690"/>
-              </a:lnSpc>
-              <a:buNone/>
-            </a:pPr>
-            <a:r>
-              <a:rPr lang="en-US" sz="1400" b="1" dirty="0">
-                <a:solidFill>
-                  <a:srgbClr val="0550AE"/>
-                </a:solidFill>
-                <a:latin typeface="Courier New" pitchFamily="34" charset="0"/>
-                <a:ea typeface="Courier New" pitchFamily="34" charset="-122"/>
-                <a:cs typeface="Courier New" pitchFamily="34" charset="-120"/>
-              </a:rPr>
-              <a:t>main</a:t>
-            </a:r>
-            <a:pPr algn="l" indent="0" marL="0">
-              <a:lnSpc>
-                <a:spcPts val="1690"/>
-              </a:lnSpc>
-              <a:buNone/>
-            </a:pPr>
-            <a:r>
-              <a:rPr lang="en-US" sz="1400" b="1" dirty="0">
-                <a:solidFill>
-                  <a:srgbClr val="59636E"/>
-                </a:solidFill>
-                <a:latin typeface="Arial" pitchFamily="34" charset="0"/>
-                <a:ea typeface="Arial" pitchFamily="34" charset="-122"/>
-                <a:cs typeface="Arial" pitchFamily="34" charset="-120"/>
-              </a:rPr>
-              <a:t> does not change.</a:t>
-            </a:r>
-            <a:endParaRPr lang="en-US" sz="1400" dirty="0"/>
-          </a:p>
-        </p:txBody>
-      </p:sp>
-    </p:spTree>
-  </p:cSld>
-  <p:clrMapOvr>
-    <a:masterClrMapping/>
-  </p:clrMapOvr>
-</p:sld>
+<ns0:sld xmlns:ns0="http://schemas.openxmlformats.org/presentationml/2006/main" xmlns:ns1="http://schemas.openxmlformats.org/drawingml/2006/main" xmlns:ns2="http://schemas.microsoft.com/office/drawing/2017/decorative" xmlns:ns3="http://schemas.openxmlformats.org/officeDocument/2006/relationships">
+  <ns0:cSld name="Slide 14">
+    <ns0:bg>
+      <ns0:bgPr>
+        <ns1:solidFill>
+          <ns1:srgbClr val="FFFFFF"/>
+        </ns1:solidFill>
+      </ns0:bgPr>
+    </ns0:bg>
+    <ns0:spTree>
+      <ns0:nvGrpSpPr>
+        <ns0:cNvPr id="1" name=""/>
+        <ns0:cNvGrpSpPr/>
+        <ns0:nvPr/>
+      </ns0:nvGrpSpPr>
+      <ns0:grpSpPr>
+        <ns1:xfrm>
+          <ns1:off x="0" y="0"/>
+          <ns1:ext cx="0" cy="0"/>
+          <ns1:chOff x="0" y="0"/>
+          <ns1:chExt cx="0" cy="0"/>
+        </ns1:xfrm>
+      </ns0:grpSpPr>
+      <ns0:pic>
+        <ns0:nvPicPr>
+          <ns0:cNvPr id="2" name="Image 0" descr="">
+            <ns1:extLst>
+              <ns1:ext uri="{C183D7F6-B498-43B3-948B-1728B52AA6E4}">
+                <ns2:decorative val="1"/>
+              </ns1:ext>
+            </ns1:extLst>
+          </ns0:cNvPr>
+          <ns0:cNvPicPr>
+            <ns1:picLocks noChangeAspect="1"/>
+          </ns0:cNvPicPr>
+          <ns0:nvPr/>
+        </ns0:nvPicPr>
+        <ns0:blipFill>
+          <ns1:blip ns3:embed="rId1"/>
+          <ns1:stretch>
+            <ns1:fillRect/>
+          </ns1:stretch>
+        </ns0:blipFill>
+        <ns0:spPr>
+          <ns1:xfrm>
+            <ns1:off x="6349901" y="0"/>
+            <ns1:ext cx="2793950" cy="1308050"/>
+          </ns1:xfrm>
+          <ns1:prstGeom prst="rect">
+            <ns1:avLst/>
+          </ns1:prstGeom>
+        </ns0:spPr>
+      </ns0:pic>
+      <ns0:sp>
+        <ns0:nvSpPr>
+          <ns0:cNvPr id="3" name="Text 0"/>
+          <ns0:cNvSpPr/>
+          <ns0:nvPr/>
+        </ns0:nvSpPr>
+        <ns0:spPr>
+          <ns1:xfrm>
+            <ns1:off x="7340501" y="177701"/>
+            <ns1:ext cx="1168301" cy="279350"/>
+          </ns1:xfrm>
+          <ns1:prstGeom prst="roundRect">
+            <ns1:avLst>
+              <ns1:gd name="adj" fmla="val 22731"/>
+            </ns1:avLst>
+          </ns1:prstGeom>
+          <ns1:solidFill>
+            <ns1:srgbClr val="1A7F37"/>
+          </ns1:solidFill>
+          <ns1:ln/>
+        </ns0:spPr>
+        <ns0:txBody>
+          <ns1:bodyPr wrap="square" rtlCol="0" anchor="ctr"/>
+          <ns1:lstStyle/>
+          <ns1:p>
+            <ns1:pPr indent="0" marL="0">
+              <ns1:buNone/>
+            </ns1:pPr>
+            <ns1:endParaRPr lang="en-US" dirty="0"/>
+          </ns1:p>
+        </ns0:txBody>
+      </ns0:sp>
+      <ns0:sp>
+        <ns0:nvSpPr>
+          <ns0:cNvPr id="4" name="Text 1"/>
+          <ns0:cNvSpPr/>
+          <ns0:nvPr/>
+        </ns0:nvSpPr>
+        <ns0:spPr>
+          <ns1:xfrm>
+            <ns1:off x="7461041" y="231577"/>
+            <ns1:ext cx="927071" cy="171450"/>
+          </ns1:xfrm>
+          <ns1:prstGeom prst="rect">
+            <ns1:avLst/>
+          </ns1:prstGeom>
+          <ns1:noFill/>
+          <ns1:ln/>
+        </ns0:spPr>
+        <ns0:txBody>
+          <ns1:bodyPr wrap="square" lIns="0" tIns="0" rIns="0" bIns="0" rtlCol="0" anchor="t"/>
+          <ns1:lstStyle/>
+          <ns1:p>
+            <ns1:pPr algn="ctr" indent="0" marL="0">
+              <ns1:buNone/>
+            </ns1:pPr>
+            <ns1:r>
+              <ns1:rPr lang="en-US" sz="1150" b="1" dirty="0">
+                <ns1:solidFill>
+                  <ns1:srgbClr val="FFFFFF"/>
+                </ns1:solidFill>
+                <ns1:latin typeface="Arial" pitchFamily="34" charset="0"/>
+                <ns1:ea typeface="Arial" pitchFamily="34" charset="-122"/>
+                <ns1:cs typeface="Arial" pitchFamily="34" charset="-120"/>
+              </ns1:rPr>
+              <ns1:t>CHAPTER 02</ns1:t>
+            </ns1:r>
+            <ns1:endParaRPr lang="en-US" sz="1150" dirty="0"/>
+          </ns1:p>
+        </ns0:txBody>
+      </ns0:sp>
+      <ns0:pic>
+        <ns0:nvPicPr>
+          <ns0:cNvPr id="5" name="Image 1" descr="Open this chapter on GitHub">
+            <ns1:hlinkClick ns3:id="rId3" tooltip="https://github.com/github/copilot-app-for-beginners/tree/main/02-sessions-worktrees-context"/>
+          </ns0:cNvPr>
+          <ns0:cNvPicPr>
+            <ns1:picLocks noChangeAspect="1"/>
+          </ns0:cNvPicPr>
+          <ns0:nvPr/>
+        </ns0:nvPicPr>
+        <ns0:blipFill>
+          <ns1:blip ns3:embed="rId2"/>
+          <ns1:stretch>
+            <ns1:fillRect/>
+          </ns1:stretch>
+        </ns0:blipFill>
+        <ns0:spPr>
+          <ns1:xfrm>
+            <ns1:off x="8610600" y="165050"/>
+            <ns1:ext cx="304800" cy="304800"/>
+          </ns1:xfrm>
+          <ns1:prstGeom prst="rect">
+            <ns1:avLst/>
+          </ns1:prstGeom>
+        </ns0:spPr>
+      </ns0:pic>
+      <ns0:sp>
+        <ns0:nvSpPr>
+          <ns0:cNvPr id="6" name="Text 2"/>
+          <ns0:cNvSpPr/>
+          <ns0:nvPr/>
+        </ns0:nvSpPr>
+        <ns0:spPr>
+          <ns1:xfrm>
+            <ns1:off x="507950" y="381000"/>
+            <ns1:ext cx="8161020" cy="190500"/>
+          </ns1:xfrm>
+          <ns1:prstGeom prst="rect">
+            <ns1:avLst/>
+          </ns1:prstGeom>
+          <ns1:noFill/>
+          <ns1:ln/>
+        </ns0:spPr>
+        <ns0:txBody>
+          <ns1:bodyPr wrap="square" lIns="0" tIns="0" rIns="0" bIns="0" rtlCol="0" anchor="t"/>
+          <ns1:lstStyle/>
+          <ns1:p>
+            <ns1:pPr algn="l" indent="0" marL="0">
+              <ns1:buNone/>
+            </ns1:pPr>
+            <ns1:r>
+              <ns1:rPr lang="en-US" sz="1250" b="1" dirty="0">
+                <ns1:solidFill>
+                  <ns1:srgbClr val="1A7F37"/>
+                </ns1:solidFill>
+                <ns1:latin typeface="Arial" pitchFamily="34" charset="0"/>
+                <ns1:ea typeface="Arial" pitchFamily="34" charset="-122"/>
+                <ns1:cs typeface="Arial" pitchFamily="34" charset="-120"/>
+              </ns1:rPr>
+              <ns1:t>YOUR TURN</ns1:t>
+            </ns1:r>
+            <ns1:endParaRPr lang="en-US" sz="1250" dirty="0"/>
+          </ns1:p>
+        </ns0:txBody>
+      </ns0:sp>
+      <ns0:sp>
+        <ns0:nvSpPr>
+          <ns0:cNvPr id="7" name="Text 3"/>
+          <ns0:cNvSpPr/>
+          <ns0:nvPr/>
+        </ns0:nvSpPr>
+        <ns0:spPr>
+          <ns1:xfrm>
+            <ns1:off x="507950" y="622250"/>
+            <ns1:ext cx="8161020" cy="419100"/>
+          </ns1:xfrm>
+          <ns1:prstGeom prst="rect">
+            <ns1:avLst/>
+          </ns1:prstGeom>
+          <ns1:noFill/>
+          <ns1:ln/>
+        </ns0:spPr>
+        <ns0:txBody>
+          <ns1:bodyPr wrap="square" lIns="0" tIns="0" rIns="0" bIns="0" rtlCol="0" anchor="t"/>
+          <ns1:lstStyle/>
+          <ns1:p>
+            <ns1:pPr algn="l" indent="0" marL="0">
+              <ns1:lnSpc>
+                <ns1:spcPts val="3300"/>
+              </ns1:lnSpc>
+              <ns1:spcBef>
+                <ns1:spcPts val="400"/>
+              </ns1:spcBef>
+              <ns1:buNone/>
+            </ns1:pPr>
+            <ns1:r>
+              <ns1:rPr lang="en-US" sz="2800" b="1" dirty="0">
+                <ns1:solidFill>
+                  <ns1:srgbClr val="1F2328"/>
+                </ns1:solidFill>
+                <ns1:latin typeface="Arial" pitchFamily="34" charset="0"/>
+                <ns1:ea typeface="Arial" pitchFamily="34" charset="-122"/>
+                <ns1:cs typeface="Arial" pitchFamily="34" charset="-120"/>
+              </ns1:rPr>
+              <ns1:t>Add a light and dark theme</ns1:t>
+            </ns1:r>
+            <ns1:endParaRPr lang="en-US" sz="2800" dirty="0"/>
+          </ns1:p>
+        </ns0:txBody>
+      </ns0:sp>
+      <ns0:sp>
+        <ns0:nvSpPr>
+          <ns0:cNvPr id="8" name="Text 4"/>
+          <ns0:cNvSpPr/>
+          <ns0:nvPr/>
+        </ns0:nvSpPr>
+        <ns0:spPr>
+          <ns1:xfrm>
+            <ns1:off x="507950" y="1104751"/>
+            <ns1:ext cx="8161020" cy="273100"/>
+          </ns1:xfrm>
+          <ns1:prstGeom prst="rect">
+            <ns1:avLst/>
+          </ns1:prstGeom>
+          <ns1:noFill/>
+          <ns1:ln/>
+        </ns0:spPr>
+        <ns0:txBody>
+          <ns1:bodyPr wrap="square" lIns="0" tIns="0" rIns="0" bIns="0" rtlCol="0" anchor="t"/>
+          <ns1:lstStyle/>
+          <ns1:p>
+            <ns1:pPr algn="l" indent="0" marL="0">
+              <ns1:lnSpc>
+                <ns1:spcPts val="2000"/>
+              </ns1:lnSpc>
+              <ns1:spcBef>
+                <ns1:spcPts val="500"/>
+              </ns1:spcBef>
+              <ns1:buNone/>
+            </ns1:pPr>
+            <ns1:r>
+              <ns1:rPr lang="en-US" sz="1650" dirty="0">
+                <ns1:solidFill>
+                  <ns1:srgbClr val="59636E"/>
+                </ns1:solidFill>
+                <ns1:latin typeface="Arial" pitchFamily="34" charset="0"/>
+                <ns1:ea typeface="Arial" pitchFamily="34" charset="-122"/>
+                <ns1:cs typeface="Arial" pitchFamily="34" charset="-120"/>
+              </ns1:rPr>
+              <ns1:t>Use </ns1:t>
+            </ns1:r>
+            <ns1:pPr algn="l" indent="0" marL="0">
+              <ns1:lnSpc>
+                <ns1:spcPts val="2000"/>
+              </ns1:lnSpc>
+              <ns1:spcBef>
+                <ns1:spcPts val="500"/>
+              </ns1:spcBef>
+              <ns1:buNone/>
+            </ns1:pPr>
+            <ns1:r>
+              <ns1:rPr lang="en-US" sz="1650" b="1" dirty="0">
+                <ns1:solidFill>
+                  <ns1:srgbClr val="0550AE"/>
+                </ns1:solidFill>
+                <ns1:latin typeface="Courier New" pitchFamily="34" charset="0"/>
+                <ns1:ea typeface="Courier New" pitchFamily="34" charset="-122"/>
+                <ns1:cs typeface="Courier New" pitchFamily="34" charset="-120"/>
+              </ns1:rPr>
+              <ns1:t>@</ns1:t>
+            </ns1:r>
+            <ns1:pPr algn="l" indent="0" marL="0">
+              <ns1:lnSpc>
+                <ns1:spcPts val="2000"/>
+              </ns1:lnSpc>
+              <ns1:spcBef>
+                <ns1:spcPts val="500"/>
+              </ns1:spcBef>
+              <ns1:buNone/>
+            </ns1:pPr>
+            <ns1:r>
+              <ns1:rPr lang="en-US" sz="1650" dirty="0">
+                <ns1:solidFill>
+                  <ns1:srgbClr val="59636E"/>
+                </ns1:solidFill>
+                <ns1:latin typeface="Arial" pitchFamily="34" charset="0"/>
+                <ns1:ea typeface="Arial" pitchFamily="34" charset="-122"/>
+                <ns1:cs typeface="Arial" pitchFamily="34" charset="-120"/>
+              </ns1:rPr>
+              <ns1:t> to attach the code this time. Keep the work in its worktree.</ns1:t>
+            </ns1:r>
+            <ns1:endParaRPr lang="en-US" sz="1650" dirty="0"/>
+          </ns1:p>
+        </ns0:txBody>
+      </ns0:sp>
+      <ns0:sp>
+        <ns0:nvSpPr>
+          <ns0:cNvPr id="9" name="Text 5"/>
+          <ns0:cNvSpPr/>
+          <ns0:nvPr/>
+        </ns0:nvSpPr>
+        <ns0:spPr>
+          <ns1:xfrm>
+            <ns1:off x="507950" y="1766143"/>
+            <ns1:ext cx="5334000" cy="2690515"/>
+          </ns1:xfrm>
+          <ns1:prstGeom prst="roundRect">
+            <ns1:avLst>
+              <ns1:gd name="adj" fmla="val 4720"/>
+            </ns1:avLst>
+          </ns1:prstGeom>
+          <ns1:solidFill>
+            <ns1:srgbClr val="FFFFFF"/>
+          </ns1:solidFill>
+          <ns1:ln w="9525">
+            <ns1:solidFill>
+              <ns1:srgbClr val="FFC49B"/>
+            </ns1:solidFill>
+          </ns1:ln>
+        </ns0:spPr>
+        <ns0:txBody>
+          <ns1:bodyPr wrap="square" rtlCol="0" anchor="ctr"/>
+          <ns1:lstStyle/>
+          <ns1:p>
+            <ns1:pPr indent="0" marL="0">
+              <ns1:buNone/>
+            </ns1:pPr>
+            <ns1:endParaRPr lang="en-US" dirty="0"/>
+          </ns1:p>
+        </ns0:txBody>
+      </ns0:sp>
+      <ns0:sp>
+        <ns0:nvSpPr>
+          <ns0:cNvPr id="10" name="Shape 6"/>
+          <ns0:cNvSpPr/>
+          <ns0:nvPr/>
+        </ns0:nvSpPr>
+        <ns0:spPr>
+          <ns1:xfrm>
+            <ns1:off x="517475" y="2461171"/>
+            <ns1:ext cx="5314950" cy="0"/>
+          </ns1:xfrm>
+          <ns1:prstGeom prst="line">
+            <ns1:avLst/>
+          </ns1:prstGeom>
+          <ns1:noFill/>
+          <ns1:ln w="9525">
+            <ns1:solidFill>
+              <ns1:srgbClr val="D1D9E0"/>
+            </ns1:solidFill>
+            <ns1:prstDash val="solid"/>
+          </ns1:ln>
+        </ns0:spPr>
+      </ns0:sp>
+      <ns0:sp>
+        <ns0:nvSpPr>
+          <ns0:cNvPr id="11" name="Text 7"/>
+          <ns0:cNvSpPr/>
+          <ns0:nvPr/>
+        </ns0:nvSpPr>
+        <ns0:spPr>
+          <ns1:xfrm>
+            <ns1:off x="695176" y="1976289"/>
+            <ns1:ext cx="279350" cy="279350"/>
+          </ns1:xfrm>
+          <ns1:prstGeom prst="roundRect">
+            <ns1:avLst>
+              <ns1:gd name="adj" fmla="val 327331"/>
+            </ns1:avLst>
+          </ns1:prstGeom>
+          <ns1:solidFill>
+            <ns1:srgbClr val="BC4C00"/>
+          </ns1:solidFill>
+          <ns1:ln/>
+        </ns0:spPr>
+        <ns0:txBody>
+          <ns1:bodyPr wrap="square" rtlCol="0" anchor="ctr"/>
+          <ns1:lstStyle/>
+          <ns1:p>
+            <ns1:pPr indent="0" marL="0">
+              <ns1:buNone/>
+            </ns1:pPr>
+            <ns1:endParaRPr lang="en-US" dirty="0"/>
+          </ns1:p>
+        </ns0:txBody>
+      </ns0:sp>
+      <ns0:sp>
+        <ns0:nvSpPr>
+          <ns0:cNvPr id="12" name="Text 8"/>
+          <ns0:cNvSpPr/>
+          <ns0:nvPr/>
+        </ns0:nvSpPr>
+        <ns0:spPr>
+          <ns1:xfrm>
+            <ns1:off x="789841" y="2020639"/>
+            <ns1:ext cx="90020" cy="190500"/>
+          </ns1:xfrm>
+          <ns1:prstGeom prst="rect">
+            <ns1:avLst/>
+          </ns1:prstGeom>
+          <ns1:noFill/>
+          <ns1:ln/>
+        </ns0:spPr>
+        <ns0:txBody>
+          <ns1:bodyPr wrap="square" lIns="0" tIns="0" rIns="0" bIns="0" rtlCol="0" anchor="t"/>
+          <ns1:lstStyle/>
+          <ns1:p>
+            <ns1:pPr algn="ctr" indent="0" marL="0">
+              <ns1:buNone/>
+            </ns1:pPr>
+            <ns1:r>
+              <ns1:rPr lang="en-US" sz="1250" b="1" dirty="0">
+                <ns1:solidFill>
+                  <ns1:srgbClr val="FFFFFF"/>
+                </ns1:solidFill>
+                <ns1:latin typeface="Arial" pitchFamily="34" charset="0"/>
+                <ns1:ea typeface="Arial" pitchFamily="34" charset="-122"/>
+                <ns1:cs typeface="Arial" pitchFamily="34" charset="-120"/>
+              </ns1:rPr>
+              <ns1:t>1</ns1:t>
+            </ns1:r>
+            <ns1:endParaRPr lang="en-US" sz="1250" dirty="0"/>
+          </ns1:p>
+        </ns0:txBody>
+      </ns0:sp>
+      <ns0:sp>
+        <ns0:nvSpPr>
+          <ns0:cNvPr id="13" name="Text 9"/>
+          <ns0:cNvSpPr/>
+          <ns0:nvPr/>
+        </ns0:nvSpPr>
+        <ns0:spPr>
+          <ns1:xfrm>
+            <ns1:off x="1152227" y="2008733"/>
+            <ns1:ext cx="1943100" cy="214610"/>
+          </ns1:xfrm>
+          <ns1:prstGeom prst="rect">
+            <ns1:avLst/>
+          </ns1:prstGeom>
+          <ns1:noFill/>
+          <ns1:ln/>
+        </ns0:spPr>
+        <ns0:txBody>
+          <ns1:bodyPr wrap="square" lIns="0" tIns="0" rIns="0" bIns="0" rtlCol="0" anchor="t"/>
+          <ns1:lstStyle/>
+          <ns1:p>
+            <ns1:pPr algn="l" indent="0" marL="0">
+              <ns1:lnSpc>
+                <ns1:spcPts val="1690"/>
+              </ns1:lnSpc>
+              <ns1:buNone/>
+            </ns1:pPr>
+            <ns1:r>
+              <ns1:rPr lang="en-US" sz="1500" b="1" dirty="0">
+                <ns1:solidFill>
+                  <ns1:srgbClr val="1F2328"/>
+                </ns1:solidFill>
+                <ns1:latin typeface="Arial" pitchFamily="34" charset="0"/>
+                <ns1:ea typeface="Arial" pitchFamily="34" charset="-122"/>
+                <ns1:cs typeface="Arial" pitchFamily="34" charset="-120"/>
+              </ns1:rPr>
+              <ns1:t>Start from main</ns1:t>
+            </ns1:r>
+            <ns1:endParaRPr lang="en-US" sz="1500" dirty="0"/>
+          </ns1:p>
+        </ns0:txBody>
+      </ns0:sp>
+      <ns0:sp>
+        <ns0:nvSpPr>
+          <ns0:cNvPr id="14" name="Text 10"/>
+          <ns0:cNvSpPr/>
+          <ns0:nvPr/>
+        </ns0:nvSpPr>
+        <ns0:spPr>
+          <ns1:xfrm>
+            <ns1:off x="3234928" y="1889968"/>
+            <ns1:ext cx="2468192" cy="452140"/>
+          </ns1:xfrm>
+          <ns1:prstGeom prst="rect">
+            <ns1:avLst/>
+          </ns1:prstGeom>
+          <ns1:noFill/>
+          <ns1:ln/>
+        </ns0:spPr>
+        <ns0:txBody>
+          <ns1:bodyPr wrap="square" lIns="0" tIns="0" rIns="0" bIns="0" rtlCol="0" anchor="t"/>
+          <ns1:lstStyle/>
+          <ns1:p>
+            <ns1:pPr algn="l" indent="0" marL="0">
+              <ns1:lnSpc>
+                <ns1:spcPts val="1630"/>
+              </ns1:lnSpc>
+              <ns1:buNone/>
+            </ns1:pPr>
+            <ns1:r>
+              <ns1:rPr lang="en-US" sz="1400" b="1" dirty="0">
+                <ns1:solidFill>
+                  <ns1:srgbClr val="59636E"/>
+                </ns1:solidFill>
+                <ns1:latin typeface="Arial" pitchFamily="34" charset="0"/>
+                <ns1:ea typeface="Arial" pitchFamily="34" charset="-122"/>
+                <ns1:cs typeface="Arial" pitchFamily="34" charset="-120"/>
+              </ns1:rPr>
+              <ns1:t>Create from main. Check usage with /context.</ns1:t>
+            </ns1:r>
+            <ns1:pPr algn="l" indent="0" marL="0">
+              <ns1:lnSpc>
+                <ns1:spcPts val="1630"/>
+              </ns1:lnSpc>
+              <ns1:buNone/>
+            </ns1:pPr>
+            <ns1:r>
+              <ns1:rPr lang="en-US" sz="1400" dirty="0">
+                <ns1:solidFill>
+                  <ns1:srgbClr val="59636E"/>
+                </ns1:solidFill>
+                <ns1:latin typeface="Arial" pitchFamily="34" charset="0"/>
+                <ns1:ea typeface="Arial" pitchFamily="34" charset="-122"/>
+                <ns1:cs typeface="Arial" pitchFamily="34" charset="-120"/>
+              </ns1:rPr>
+              <ns1:t/>
+            </ns1:r>
+            <ns1:pPr algn="l" indent="0" marL="0">
+              <ns1:lnSpc>
+                <ns1:spcPts val="1630"/>
+              </ns1:lnSpc>
+              <ns1:buNone/>
+            </ns1:pPr>
+            <ns1:r>
+              <ns1:rPr lang="en-US" sz="1400" b="1" dirty="0">
+                <ns1:solidFill>
+                  <ns1:srgbClr val="0550AE"/>
+                </ns1:solidFill>
+                <ns1:latin typeface="Courier New" pitchFamily="34" charset="0"/>
+                <ns1:ea typeface="Courier New" pitchFamily="34" charset="-122"/>
+                <ns1:cs typeface="Courier New" pitchFamily="34" charset="-120"/>
+              </ns1:rPr>
+              <ns1:t/>
+            </ns1:r>
+            <ns1:pPr algn="l" indent="0" marL="0">
+              <ns1:lnSpc>
+                <ns1:spcPts val="1630"/>
+              </ns1:lnSpc>
+              <ns1:buNone/>
+            </ns1:pPr>
+            <ns1:r>
+              <ns1:rPr lang="en-US" sz="1400" dirty="0">
+                <ns1:solidFill>
+                  <ns1:srgbClr val="59636E"/>
+                </ns1:solidFill>
+                <ns1:latin typeface="Arial" pitchFamily="34" charset="0"/>
+                <ns1:ea typeface="Arial" pitchFamily="34" charset="-122"/>
+                <ns1:cs typeface="Arial" pitchFamily="34" charset="-120"/>
+              </ns1:rPr>
+              <ns1:t/>
+            </ns1:r>
+            <ns1:pPr algn="l" indent="0" marL="0">
+              <ns1:lnSpc>
+                <ns1:spcPts val="1630"/>
+              </ns1:lnSpc>
+              <ns1:buNone/>
+            </ns1:pPr>
+            <ns1:r>
+              <ns1:rPr lang="en-US" sz="1400" b="1" dirty="0">
+                <ns1:solidFill>
+                  <ns1:srgbClr val="0550AE"/>
+                </ns1:solidFill>
+                <ns1:latin typeface="Courier New" pitchFamily="34" charset="0"/>
+                <ns1:ea typeface="Courier New" pitchFamily="34" charset="-122"/>
+                <ns1:cs typeface="Courier New" pitchFamily="34" charset="-120"/>
+              </ns1:rPr>
+              <ns1:t/>
+            </ns1:r>
+            <ns1:pPr algn="l" indent="0" marL="0">
+              <ns1:lnSpc>
+                <ns1:spcPts val="1630"/>
+              </ns1:lnSpc>
+              <ns1:buNone/>
+            </ns1:pPr>
+            <ns1:r>
+              <ns1:rPr lang="en-US" sz="1400" dirty="0">
+                <ns1:solidFill>
+                  <ns1:srgbClr val="59636E"/>
+                </ns1:solidFill>
+                <ns1:latin typeface="Arial" pitchFamily="34" charset="0"/>
+                <ns1:ea typeface="Arial" pitchFamily="34" charset="-122"/>
+                <ns1:cs typeface="Arial" pitchFamily="34" charset="-120"/>
+              </ns1:rPr>
+              <ns1:t/>
+            </ns1:r>
+            <ns1:endParaRPr lang="en-US" sz="1400" dirty="0"/>
+          </ns1:p>
+        </ns0:txBody>
+      </ns0:sp>
+      <ns0:sp>
+        <ns0:nvSpPr>
+          <ns0:cNvPr id="15" name="Shape 11"/>
+          <ns0:cNvSpPr/>
+          <ns0:nvPr/>
+        </ns0:nvSpPr>
+        <ns0:spPr>
+          <ns1:xfrm>
+            <ns1:off x="517475" y="3113336"/>
+            <ns1:ext cx="5314950" cy="0"/>
+          </ns1:xfrm>
+          <ns1:prstGeom prst="line">
+            <ns1:avLst/>
+          </ns1:prstGeom>
+          <ns1:noFill/>
+          <ns1:ln w="9525">
+            <ns1:solidFill>
+              <ns1:srgbClr val="D1D9E0"/>
+            </ns1:solidFill>
+            <ns1:prstDash val="solid"/>
+          </ns1:ln>
+        </ns0:spPr>
+      </ns0:sp>
+      <ns0:sp>
+        <ns0:nvSpPr>
+          <ns0:cNvPr id="16" name="Text 12"/>
+          <ns0:cNvSpPr/>
+          <ns0:nvPr/>
+        </ns0:nvSpPr>
+        <ns0:spPr>
+          <ns1:xfrm>
+            <ns1:off x="695176" y="2647504"/>
+            <ns1:ext cx="279350" cy="279350"/>
+          </ns1:xfrm>
+          <ns1:prstGeom prst="roundRect">
+            <ns1:avLst>
+              <ns1:gd name="adj" fmla="val 327331"/>
+            </ns1:avLst>
+          </ns1:prstGeom>
+          <ns1:solidFill>
+            <ns1:srgbClr val="BC4C00"/>
+          </ns1:solidFill>
+          <ns1:ln/>
+        </ns0:spPr>
+        <ns0:txBody>
+          <ns1:bodyPr wrap="square" rtlCol="0" anchor="ctr"/>
+          <ns1:lstStyle/>
+          <ns1:p>
+            <ns1:pPr indent="0" marL="0">
+              <ns1:buNone/>
+            </ns1:pPr>
+            <ns1:endParaRPr lang="en-US" dirty="0"/>
+          </ns1:p>
+        </ns0:txBody>
+      </ns0:sp>
+      <ns0:sp>
+        <ns0:nvSpPr>
+          <ns0:cNvPr id="17" name="Text 13"/>
+          <ns0:cNvSpPr/>
+          <ns0:nvPr/>
+        </ns0:nvSpPr>
+        <ns0:spPr>
+          <ns1:xfrm>
+            <ns1:off x="789841" y="2691854"/>
+            <ns1:ext cx="90020" cy="190500"/>
+          </ns1:xfrm>
+          <ns1:prstGeom prst="rect">
+            <ns1:avLst/>
+          </ns1:prstGeom>
+          <ns1:noFill/>
+          <ns1:ln/>
+        </ns0:spPr>
+        <ns0:txBody>
+          <ns1:bodyPr wrap="square" lIns="0" tIns="0" rIns="0" bIns="0" rtlCol="0" anchor="t"/>
+          <ns1:lstStyle/>
+          <ns1:p>
+            <ns1:pPr algn="ctr" indent="0" marL="0">
+              <ns1:buNone/>
+            </ns1:pPr>
+            <ns1:r>
+              <ns1:rPr lang="en-US" sz="1250" b="1" dirty="0">
+                <ns1:solidFill>
+                  <ns1:srgbClr val="FFFFFF"/>
+                </ns1:solidFill>
+                <ns1:latin typeface="Arial" pitchFamily="34" charset="0"/>
+                <ns1:ea typeface="Arial" pitchFamily="34" charset="-122"/>
+                <ns1:cs typeface="Arial" pitchFamily="34" charset="-120"/>
+              </ns1:rPr>
+              <ns1:t>2</ns1:t>
+            </ns1:r>
+            <ns1:endParaRPr lang="en-US" sz="1250" dirty="0"/>
+          </ns1:p>
+        </ns0:txBody>
+      </ns0:sp>
+      <ns0:sp>
+        <ns0:nvSpPr>
+          <ns0:cNvPr id="18" name="Text 14"/>
+          <ns0:cNvSpPr/>
+          <ns0:nvPr/>
+        </ns0:nvSpPr>
+        <ns0:spPr>
+          <ns1:xfrm>
+            <ns1:off x="1152227" y="2679948"/>
+            <ns1:ext cx="1943100" cy="214610"/>
+          </ns1:xfrm>
+          <ns1:prstGeom prst="rect">
+            <ns1:avLst/>
+          </ns1:prstGeom>
+          <ns1:noFill/>
+          <ns1:ln/>
+        </ns0:spPr>
+        <ns0:txBody>
+          <ns1:bodyPr wrap="square" lIns="0" tIns="0" rIns="0" bIns="0" rtlCol="0" anchor="t"/>
+          <ns1:lstStyle/>
+          <ns1:p>
+            <ns1:pPr algn="l" indent="0" marL="0">
+              <ns1:lnSpc>
+                <ns1:spcPts val="1690"/>
+              </ns1:lnSpc>
+              <ns1:buNone/>
+            </ns1:pPr>
+            <ns1:r>
+              <ns1:rPr lang="en-US" sz="1500" b="1" dirty="0">
+                <ns1:solidFill>
+                  <ns1:srgbClr val="1F2328"/>
+                </ns1:solidFill>
+                <ns1:latin typeface="Arial" pitchFamily="34" charset="0"/>
+                <ns1:ea typeface="Arial" pitchFamily="34" charset="-122"/>
+                <ns1:cs typeface="Arial" pitchFamily="34" charset="-120"/>
+              </ns1:rPr>
+              <ns1:t>Plan with @src</ns1:t>
+            </ns1:r>
+            <ns1:endParaRPr lang="en-US" sz="1500" dirty="0"/>
+          </ns1:p>
+        </ns0:txBody>
+      </ns0:sp>
+      <ns0:sp>
+        <ns0:nvSpPr>
+          <ns0:cNvPr id="19" name="Text 15"/>
+          <ns0:cNvSpPr/>
+          <ns0:nvPr/>
+        </ns0:nvSpPr>
+        <ns0:spPr>
+          <ns1:xfrm>
+            <ns1:off x="3234928" y="2580233"/>
+            <ns1:ext cx="2468192" cy="414040"/>
+          </ns1:xfrm>
+          <ns1:prstGeom prst="rect">
+            <ns1:avLst/>
+          </ns1:prstGeom>
+          <ns1:noFill/>
+          <ns1:ln/>
+        </ns0:spPr>
+        <ns0:txBody>
+          <ns1:bodyPr wrap="square" lIns="0" tIns="0" rIns="0" bIns="0" rtlCol="0" anchor="t"/>
+          <ns1:lstStyle/>
+          <ns1:p>
+            <ns1:pPr algn="l" indent="0" marL="0">
+              <ns1:lnSpc>
+                <ns1:spcPts val="1630"/>
+              </ns1:lnSpc>
+              <ns1:buNone/>
+            </ns1:pPr>
+            <ns1:r>
+              <ns1:rPr lang="en-US" sz="1400" dirty="0">
+                <ns1:solidFill>
+                  <ns1:srgbClr val="59636E"/>
+                </ns1:solidFill>
+                <ns1:latin typeface="Arial" pitchFamily="34" charset="0"/>
+                <ns1:ea typeface="Arial" pitchFamily="34" charset="-122"/>
+                <ns1:cs typeface="Arial" pitchFamily="34" charset="-120"/>
+              </ns1:rPr>
+              <ns1:t>Accessible toggle, readable in both themes.</ns1:t>
+            </ns1:r>
+            <ns1:endParaRPr lang="en-US" sz="1400" dirty="0"/>
+          </ns1:p>
+        </ns0:txBody>
+      </ns0:sp>
+      <ns0:sp>
+        <ns0:nvSpPr>
+          <ns0:cNvPr id="20" name="Shape 16"/>
+          <ns0:cNvSpPr/>
+          <ns0:nvPr/>
+        </ns0:nvSpPr>
+        <ns0:spPr>
+          <ns1:xfrm>
+            <ns1:off x="517475" y="3780681"/>
+            <ns1:ext cx="5314950" cy="0"/>
+          </ns1:xfrm>
+          <ns1:prstGeom prst="line">
+            <ns1:avLst/>
+          </ns1:prstGeom>
+          <ns1:noFill/>
+          <ns1:ln w="9525">
+            <ns1:solidFill>
+              <ns1:srgbClr val="D1D9E0"/>
+            </ns1:solidFill>
+            <ns1:prstDash val="solid"/>
+          </ns1:ln>
+        </ns0:spPr>
+      </ns0:sp>
+      <ns0:sp>
+        <ns0:nvSpPr>
+          <ns0:cNvPr id="21" name="Text 17"/>
+          <ns0:cNvSpPr/>
+          <ns0:nvPr/>
+        </ns0:nvSpPr>
+        <ns0:spPr>
+          <ns1:xfrm>
+            <ns1:off x="695176" y="3307259"/>
+            <ns1:ext cx="279350" cy="279350"/>
+          </ns1:xfrm>
+          <ns1:prstGeom prst="roundRect">
+            <ns1:avLst>
+              <ns1:gd name="adj" fmla="val 327331"/>
+            </ns1:avLst>
+          </ns1:prstGeom>
+          <ns1:solidFill>
+            <ns1:srgbClr val="BC4C00"/>
+          </ns1:solidFill>
+          <ns1:ln/>
+        </ns0:spPr>
+        <ns0:txBody>
+          <ns1:bodyPr wrap="square" rtlCol="0" anchor="ctr"/>
+          <ns1:lstStyle/>
+          <ns1:p>
+            <ns1:pPr indent="0" marL="0">
+              <ns1:buNone/>
+            </ns1:pPr>
+            <ns1:endParaRPr lang="en-US" dirty="0"/>
+          </ns1:p>
+        </ns0:txBody>
+      </ns0:sp>
+      <ns0:sp>
+        <ns0:nvSpPr>
+          <ns0:cNvPr id="22" name="Text 18"/>
+          <ns0:cNvSpPr/>
+          <ns0:nvPr/>
+        </ns0:nvSpPr>
+        <ns0:spPr>
+          <ns1:xfrm>
+            <ns1:off x="789841" y="3351609"/>
+            <ns1:ext cx="90020" cy="190500"/>
+          </ns1:xfrm>
+          <ns1:prstGeom prst="rect">
+            <ns1:avLst/>
+          </ns1:prstGeom>
+          <ns1:noFill/>
+          <ns1:ln/>
+        </ns0:spPr>
+        <ns0:txBody>
+          <ns1:bodyPr wrap="square" lIns="0" tIns="0" rIns="0" bIns="0" rtlCol="0" anchor="t"/>
+          <ns1:lstStyle/>
+          <ns1:p>
+            <ns1:pPr algn="ctr" indent="0" marL="0">
+              <ns1:buNone/>
+            </ns1:pPr>
+            <ns1:r>
+              <ns1:rPr lang="en-US" sz="1250" b="1" dirty="0">
+                <ns1:solidFill>
+                  <ns1:srgbClr val="FFFFFF"/>
+                </ns1:solidFill>
+                <ns1:latin typeface="Arial" pitchFamily="34" charset="0"/>
+                <ns1:ea typeface="Arial" pitchFamily="34" charset="-122"/>
+                <ns1:cs typeface="Arial" pitchFamily="34" charset="-120"/>
+              </ns1:rPr>
+              <ns1:t>3</ns1:t>
+            </ns1:r>
+            <ns1:endParaRPr lang="en-US" sz="1250" dirty="0"/>
+          </ns1:p>
+        </ns0:txBody>
+      </ns0:sp>
+      <ns0:sp>
+        <ns0:nvSpPr>
+          <ns0:cNvPr id="23" name="Text 19"/>
+          <ns0:cNvSpPr/>
+          <ns0:nvPr/>
+        </ns0:nvSpPr>
+        <ns0:spPr>
+          <ns1:xfrm>
+            <ns1:off x="1152227" y="3232398"/>
+            <ns1:ext cx="1943100" cy="429220"/>
+          </ns1:xfrm>
+          <ns1:prstGeom prst="rect">
+            <ns1:avLst/>
+          </ns1:prstGeom>
+          <ns1:noFill/>
+          <ns1:ln/>
+        </ns0:spPr>
+        <ns0:txBody>
+          <ns1:bodyPr wrap="square" lIns="0" tIns="0" rIns="0" bIns="0" rtlCol="0" anchor="t"/>
+          <ns1:lstStyle/>
+          <ns1:p>
+            <ns1:pPr algn="l" indent="0" marL="0">
+              <ns1:lnSpc>
+                <ns1:spcPts val="1690"/>
+              </ns1:lnSpc>
+              <ns1:buNone/>
+            </ns1:pPr>
+            <ns1:r>
+              <ns1:rPr lang="en-US" sz="1500" b="1" dirty="0">
+                <ns1:solidFill>
+                  <ns1:srgbClr val="1F2328"/>
+                </ns1:solidFill>
+                <ns1:latin typeface="Arial" pitchFamily="34" charset="0"/>
+                <ns1:ea typeface="Arial" pitchFamily="34" charset="-122"/>
+                <ns1:cs typeface="Arial" pitchFamily="34" charset="-120"/>
+              </ns1:rPr>
+              <ns1:t>Implement and inspect</ns1:t>
+            </ns1:r>
+            <ns1:endParaRPr lang="en-US" sz="1500" dirty="0"/>
+          </ns1:p>
+        </ns0:txBody>
+      </ns0:sp>
+      <ns0:sp>
+        <ns0:nvSpPr>
+          <ns0:cNvPr id="24" name="Text 20"/>
+          <ns0:cNvSpPr/>
+          <ns0:nvPr/>
+        </ns0:nvSpPr>
+        <ns0:spPr>
+          <ns1:xfrm>
+            <ns1:off x="3234928" y="3239988"/>
+            <ns1:ext cx="2468192" cy="414040"/>
+          </ns1:xfrm>
+          <ns1:prstGeom prst="rect">
+            <ns1:avLst/>
+          </ns1:prstGeom>
+          <ns1:noFill/>
+          <ns1:ln/>
+        </ns0:spPr>
+        <ns0:txBody>
+          <ns1:bodyPr wrap="square" lIns="0" tIns="0" rIns="0" bIns="0" rtlCol="0" anchor="t"/>
+          <ns1:lstStyle/>
+          <ns1:p>
+            <ns1:pPr algn="l" indent="0" marL="0">
+              <ns1:lnSpc>
+                <ns1:spcPts val="1630"/>
+              </ns1:lnSpc>
+              <ns1:buNone/>
+            </ns1:pPr>
+            <ns1:r>
+              <ns1:rPr lang="en-US" sz="1400" dirty="0">
+                <ns1:solidFill>
+                  <ns1:srgbClr val="59636E"/>
+                </ns1:solidFill>
+                <ns1:latin typeface="Arial" pitchFamily="34" charset="0"/>
+                <ns1:ea typeface="Arial" pitchFamily="34" charset="-122"/>
+                <ns1:cs typeface="Arial" pitchFamily="34" charset="-120"/>
+              </ns1:rPr>
+              <ns1:t>Check the diff and both themes.</ns1:t>
+            </ns1:r>
+            <ns1:endParaRPr lang="en-US" sz="1400" dirty="0"/>
+          </ns1:p>
+        </ns0:txBody>
+      </ns0:sp>
+      <ns0:sp>
+        <ns0:nvSpPr>
+          <ns0:cNvPr id="25" name="Text 21"/>
+          <ns0:cNvSpPr/>
+          <ns0:nvPr/>
+        </ns0:nvSpPr>
+        <ns0:spPr>
+          <ns1:xfrm>
+            <ns1:off x="695176" y="3976539"/>
+            <ns1:ext cx="279350" cy="279350"/>
+          </ns1:xfrm>
+          <ns1:prstGeom prst="roundRect">
+            <ns1:avLst>
+              <ns1:gd name="adj" fmla="val 327331"/>
+            </ns1:avLst>
+          </ns1:prstGeom>
+          <ns1:solidFill>
+            <ns1:srgbClr val="BC4C00"/>
+          </ns1:solidFill>
+          <ns1:ln/>
+        </ns0:spPr>
+        <ns0:txBody>
+          <ns1:bodyPr wrap="square" rtlCol="0" anchor="ctr"/>
+          <ns1:lstStyle/>
+          <ns1:p>
+            <ns1:pPr indent="0" marL="0">
+              <ns1:buNone/>
+            </ns1:pPr>
+            <ns1:endParaRPr lang="en-US" dirty="0"/>
+          </ns1:p>
+        </ns0:txBody>
+      </ns0:sp>
+      <ns0:sp>
+        <ns0:nvSpPr>
+          <ns0:cNvPr id="26" name="Text 22"/>
+          <ns0:cNvSpPr/>
+          <ns0:nvPr/>
+        </ns0:nvSpPr>
+        <ns0:spPr>
+          <ns1:xfrm>
+            <ns1:off x="789841" y="4020889"/>
+            <ns1:ext cx="90020" cy="190500"/>
+          </ns1:xfrm>
+          <ns1:prstGeom prst="rect">
+            <ns1:avLst/>
+          </ns1:prstGeom>
+          <ns1:noFill/>
+          <ns1:ln/>
+        </ns0:spPr>
+        <ns0:txBody>
+          <ns1:bodyPr wrap="square" lIns="0" tIns="0" rIns="0" bIns="0" rtlCol="0" anchor="t"/>
+          <ns1:lstStyle/>
+          <ns1:p>
+            <ns1:pPr algn="ctr" indent="0" marL="0">
+              <ns1:buNone/>
+            </ns1:pPr>
+            <ns1:r>
+              <ns1:rPr lang="en-US" sz="1250" b="1" dirty="0">
+                <ns1:solidFill>
+                  <ns1:srgbClr val="FFFFFF"/>
+                </ns1:solidFill>
+                <ns1:latin typeface="Arial" pitchFamily="34" charset="0"/>
+                <ns1:ea typeface="Arial" pitchFamily="34" charset="-122"/>
+                <ns1:cs typeface="Arial" pitchFamily="34" charset="-120"/>
+              </ns1:rPr>
+              <ns1:t>4</ns1:t>
+            </ns1:r>
+            <ns1:endParaRPr lang="en-US" sz="1250" dirty="0"/>
+          </ns1:p>
+        </ns0:txBody>
+      </ns0:sp>
+      <ns0:sp>
+        <ns0:nvSpPr>
+          <ns0:cNvPr id="27" name="Text 23"/>
+          <ns0:cNvSpPr/>
+          <ns0:nvPr/>
+        </ns0:nvSpPr>
+        <ns0:spPr>
+          <ns1:xfrm>
+            <ns1:off x="1152227" y="4008983"/>
+            <ns1:ext cx="1943100" cy="214610"/>
+          </ns1:xfrm>
+          <ns1:prstGeom prst="rect">
+            <ns1:avLst/>
+          </ns1:prstGeom>
+          <ns1:noFill/>
+          <ns1:ln/>
+        </ns0:spPr>
+        <ns0:txBody>
+          <ns1:bodyPr wrap="square" lIns="0" tIns="0" rIns="0" bIns="0" rtlCol="0" anchor="t"/>
+          <ns1:lstStyle/>
+          <ns1:p>
+            <ns1:pPr algn="l" indent="0" marL="0">
+              <ns1:lnSpc>
+                <ns1:spcPts val="1690"/>
+              </ns1:lnSpc>
+              <ns1:buNone/>
+            </ns1:pPr>
+            <ns1:r>
+              <ns1:rPr lang="en-US" sz="1500" b="1" dirty="0">
+                <ns1:solidFill>
+                  <ns1:srgbClr val="1F2328"/>
+                </ns1:solidFill>
+                <ns1:latin typeface="Arial" pitchFamily="34" charset="0"/>
+                <ns1:ea typeface="Arial" pitchFamily="34" charset="-122"/>
+                <ns1:cs typeface="Arial" pitchFamily="34" charset="-120"/>
+              </ns1:rPr>
+              <ns1:t>Validate and recap</ns1:t>
+            </ns1:r>
+            <ns1:endParaRPr lang="en-US" sz="1500" dirty="0"/>
+          </ns1:p>
+        </ns0:txBody>
+      </ns0:sp>
+      <ns0:sp>
+        <ns0:nvSpPr>
+          <ns0:cNvPr id="28" name="Text 24"/>
+          <ns0:cNvSpPr/>
+          <ns0:nvPr/>
+        </ns0:nvSpPr>
+        <ns0:spPr>
+          <ns1:xfrm>
+            <ns1:off x="3234928" y="3899743"/>
+            <ns1:ext cx="2468192" cy="433090"/>
+          </ns1:xfrm>
+          <ns1:prstGeom prst="rect">
+            <ns1:avLst/>
+          </ns1:prstGeom>
+          <ns1:noFill/>
+          <ns1:ln/>
+        </ns0:spPr>
+        <ns0:txBody>
+          <ns1:bodyPr wrap="square" lIns="0" tIns="0" rIns="0" bIns="0" rtlCol="0" anchor="t"/>
+          <ns1:lstStyle/>
+          <ns1:p>
+            <ns1:pPr algn="l" indent="0" marL="0">
+              <ns1:lnSpc>
+                <ns1:spcPts val="1630"/>
+              </ns1:lnSpc>
+              <ns1:buNone/>
+            </ns1:pPr>
+            <ns1:r>
+              <ns1:rPr lang="en-US" sz="1400" dirty="0">
+                <ns1:solidFill>
+                  <ns1:srgbClr val="59636E"/>
+                </ns1:solidFill>
+                <ns1:latin typeface="Arial" pitchFamily="34" charset="0"/>
+                <ns1:ea typeface="Arial" pitchFamily="34" charset="-122"/>
+                <ns1:cs typeface="Arial" pitchFamily="34" charset="-120"/>
+              </ns1:rPr>
+              <ns1:t>Tests, build, then </ns1:t>
+            </ns1:r>
+            <ns1:pPr algn="l" indent="0" marL="0">
+              <ns1:lnSpc>
+                <ns1:spcPts val="1630"/>
+              </ns1:lnSpc>
+              <ns1:buNone/>
+            </ns1:pPr>
+            <ns1:r>
+              <ns1:rPr lang="en-US" sz="1400" b="1" dirty="0">
+                <ns1:solidFill>
+                  <ns1:srgbClr val="0550AE"/>
+                </ns1:solidFill>
+                <ns1:latin typeface="Courier New" pitchFamily="34" charset="0"/>
+                <ns1:ea typeface="Courier New" pitchFamily="34" charset="-122"/>
+                <ns1:cs typeface="Courier New" pitchFamily="34" charset="-120"/>
+              </ns1:rPr>
+              <ns1:t>/chronicle standup</ns1:t>
+            </ns1:r>
+            <ns1:pPr algn="l" indent="0" marL="0">
+              <ns1:lnSpc>
+                <ns1:spcPts val="1630"/>
+              </ns1:lnSpc>
+              <ns1:buNone/>
+            </ns1:pPr>
+            <ns1:r>
+              <ns1:rPr lang="en-US" sz="1400" dirty="0">
+                <ns1:solidFill>
+                  <ns1:srgbClr val="59636E"/>
+                </ns1:solidFill>
+                <ns1:latin typeface="Arial" pitchFamily="34" charset="0"/>
+                <ns1:ea typeface="Arial" pitchFamily="34" charset="-122"/>
+                <ns1:cs typeface="Arial" pitchFamily="34" charset="-120"/>
+              </ns1:rPr>
+              <ns1:t>.</ns1:t>
+            </ns1:r>
+            <ns1:endParaRPr lang="en-US" sz="1400" dirty="0"/>
+          </ns1:p>
+        </ns0:txBody>
+      </ns0:sp>
+      <ns0:sp>
+        <ns0:nvSpPr>
+          <ns0:cNvPr id="29" name="Text 25"/>
+          <ns0:cNvSpPr/>
+          <ns0:nvPr/>
+        </ns0:nvSpPr>
+        <ns0:spPr>
+          <ns1:xfrm>
+            <ns1:off x="6045101" y="1766143"/>
+            <ns1:ext cx="2590800" cy="2690515"/>
+          </ns1:xfrm>
+          <ns1:prstGeom prst="roundRect">
+            <ns1:avLst>
+              <ns1:gd name="adj" fmla="val 4902"/>
+            </ns1:avLst>
+          </ns1:prstGeom>
+          <ns1:solidFill>
+            <ns1:srgbClr val="FFFFFF"/>
+          </ns1:solidFill>
+          <ns1:ln w="9525">
+            <ns1:solidFill>
+              <ns1:srgbClr val="FFC49B"/>
+            </ns1:solidFill>
+          </ns1:ln>
+        </ns0:spPr>
+        <ns0:txBody>
+          <ns1:bodyPr wrap="square" rtlCol="0" anchor="ctr"/>
+          <ns1:lstStyle/>
+          <ns1:p>
+            <ns1:pPr indent="0" marL="0">
+              <ns1:buNone/>
+            </ns1:pPr>
+            <ns1:endParaRPr lang="en-US" dirty="0"/>
+          </ns1:p>
+        </ns0:txBody>
+      </ns0:sp>
+      <ns0:sp>
+        <ns0:nvSpPr>
+          <ns0:cNvPr id="30" name="Text 26"/>
+          <ns0:cNvSpPr/>
+          <ns0:nvPr/>
+        </ns0:nvSpPr>
+        <ns0:spPr>
+          <ns1:xfrm>
+            <ns1:off x="6232327" y="1953369"/>
+            <ns1:ext cx="381000" cy="381000"/>
+          </ns1:xfrm>
+          <ns1:prstGeom prst="roundRect">
+            <ns1:avLst>
+              <ns1:gd name="adj" fmla="val 23333"/>
+            </ns1:avLst>
+          </ns1:prstGeom>
+          <ns1:solidFill>
+            <ns1:srgbClr val="FFF1E5"/>
+          </ns1:solidFill>
+          <ns1:ln/>
+        </ns0:spPr>
+        <ns0:txBody>
+          <ns1:bodyPr wrap="square" rtlCol="0" anchor="ctr"/>
+          <ns1:lstStyle/>
+          <ns1:p>
+            <ns1:pPr indent="0" marL="0">
+              <ns1:buNone/>
+            </ns1:pPr>
+            <ns1:endParaRPr lang="en-US" dirty="0"/>
+          </ns1:p>
+        </ns0:txBody>
+      </ns0:sp>
+      <ns0:pic>
+        <ns0:nvPicPr>
+          <ns0:cNvPr id="31" name="Image 2" descr="">
+            <ns1:extLst>
+              <ns1:ext uri="{C183D7F6-B498-43B3-948B-1728B52AA6E4}">
+                <ns2:decorative val="1"/>
+              </ns1:ext>
+            </ns1:extLst>
+          </ns0:cNvPr>
+          <ns0:cNvPicPr>
+            <ns1:picLocks noChangeAspect="1"/>
+          </ns0:cNvPicPr>
+          <ns0:nvPr/>
+        </ns0:nvPicPr>
+        <ns0:blipFill>
+          <ns1:blip ns3:embed="rId4"/>
+          <ns1:stretch>
+            <ns1:fillRect/>
+          </ns1:stretch>
+        </ns0:blipFill>
+        <ns0:spPr>
+          <ns1:xfrm>
+            <ns1:off x="6314926" y="2035969"/>
+            <ns1:ext cx="215801" cy="215801"/>
+          </ns1:xfrm>
+          <ns1:prstGeom prst="rect">
+            <ns1:avLst/>
+          </ns1:prstGeom>
+        </ns0:spPr>
+      </ns0:pic>
+      <ns0:sp>
+        <ns0:nvSpPr>
+          <ns0:cNvPr id="32" name="Text 27"/>
+          <ns0:cNvSpPr/>
+          <ns0:nvPr/>
+        </ns0:nvSpPr>
+        <ns0:spPr>
+          <ns1:xfrm>
+            <ns1:off x="6727627" y="2029569"/>
+            <ns1:ext cx="867564" cy="228600"/>
+          </ns1:xfrm>
+          <ns1:prstGeom prst="rect">
+            <ns1:avLst/>
+          </ns1:prstGeom>
+          <ns1:noFill/>
+          <ns1:ln/>
+        </ns0:spPr>
+        <ns0:txBody>
+          <ns1:bodyPr wrap="square" lIns="0" tIns="0" rIns="0" bIns="0" rtlCol="0" anchor="t"/>
+          <ns1:lstStyle/>
+          <ns1:p>
+            <ns1:pPr algn="l" indent="0" marL="0">
+              <ns1:lnSpc>
+                <ns1:spcPts val="1800"/>
+              </ns1:lnSpc>
+              <ns1:buNone/>
+            </ns1:pPr>
+            <ns1:r>
+              <ns1:rPr lang="en-US" sz="1650" b="1" dirty="0">
+                <ns1:solidFill>
+                  <ns1:srgbClr val="1F2328"/>
+                </ns1:solidFill>
+                <ns1:latin typeface="Arial" pitchFamily="34" charset="0"/>
+                <ns1:ea typeface="Arial" pitchFamily="34" charset="-122"/>
+                <ns1:cs typeface="Arial" pitchFamily="34" charset="-120"/>
+              </ns1:rPr>
+              <ns1:t>Success</ns1:t>
+            </ns1:r>
+            <ns1:endParaRPr lang="en-US" sz="1650" dirty="0"/>
+          </ns1:p>
+        </ns0:txBody>
+      </ns0:sp>
+      <ns0:sp>
+        <ns0:nvSpPr>
+          <ns0:cNvPr id="33" name="Text 28"/>
+          <ns0:cNvSpPr/>
+          <ns0:nvPr/>
+        </ns0:nvSpPr>
+        <ns0:spPr>
+          <ns1:xfrm>
+            <ns1:off x="6232327" y="2410569"/>
+            <ns1:ext cx="2260675" cy="867966"/>
+          </ns1:xfrm>
+          <ns1:prstGeom prst="rect">
+            <ns1:avLst/>
+          </ns1:prstGeom>
+          <ns1:noFill/>
+          <ns1:ln/>
+        </ns0:spPr>
+        <ns0:txBody>
+          <ns1:bodyPr wrap="square" lIns="0" tIns="0" rIns="0" bIns="0" rtlCol="0" anchor="t"/>
+          <ns1:lstStyle/>
+          <ns1:p>
+            <ns1:pPr algn="l" indent="0" marL="0">
+              <ns1:lnSpc>
+                <ns1:spcPts val="1690"/>
+              </ns1:lnSpc>
+              <ns1:buNone/>
+            </ns1:pPr>
+            <ns1:r>
+              <ns1:rPr lang="en-US" sz="1400" dirty="0">
+                <ns1:solidFill>
+                  <ns1:srgbClr val="59636E"/>
+                </ns1:solidFill>
+                <ns1:latin typeface="Arial" pitchFamily="34" charset="0"/>
+                <ns1:ea typeface="Arial" pitchFamily="34" charset="-122"/>
+                <ns1:cs typeface="Arial" pitchFamily="34" charset="-120"/>
+              </ns1:rPr>
+              <ns1:t>You can name the branch, the context you attached, and your evidence. </ns1:t>
+            </ns1:r>
+            <ns1:pPr algn="l" indent="0" marL="0">
+              <ns1:lnSpc>
+                <ns1:spcPts val="1690"/>
+              </ns1:lnSpc>
+              <ns1:buNone/>
+            </ns1:pPr>
+            <ns1:r>
+              <ns1:rPr lang="en-US" sz="1400" b="1" dirty="0">
+                <ns1:solidFill>
+                  <ns1:srgbClr val="0550AE"/>
+                </ns1:solidFill>
+                <ns1:latin typeface="Courier New" pitchFamily="34" charset="0"/>
+                <ns1:ea typeface="Courier New" pitchFamily="34" charset="-122"/>
+                <ns1:cs typeface="Courier New" pitchFamily="34" charset="-120"/>
+              </ns1:rPr>
+              <ns1:t>main</ns1:t>
+            </ns1:r>
+            <ns1:pPr algn="l" indent="0" marL="0">
+              <ns1:lnSpc>
+                <ns1:spcPts val="1690"/>
+              </ns1:lnSpc>
+              <ns1:buNone/>
+            </ns1:pPr>
+            <ns1:r>
+              <ns1:rPr lang="en-US" sz="1400" b="1" dirty="0">
+                <ns1:solidFill>
+                  <ns1:srgbClr val="59636E"/>
+                </ns1:solidFill>
+                <ns1:latin typeface="Arial" pitchFamily="34" charset="0"/>
+                <ns1:ea typeface="Arial" pitchFamily="34" charset="-122"/>
+                <ns1:cs typeface="Arial" pitchFamily="34" charset="-120"/>
+              </ns1:rPr>
+              <ns1:t> does not change.</ns1:t>
+            </ns1:r>
+            <ns1:endParaRPr lang="en-US" sz="1400" dirty="0"/>
+          </ns1:p>
+        </ns0:txBody>
+      </ns0:sp>
+    </ns0:spTree>
+  </ns0:cSld>
+  <ns0:clrMapOvr>
+    <ns1:masterClrMapping/>
+  </ns0:clrMapOvr>
+</ns0:sld>
 </file>
 
 <file path=ppt/slides/slide15.xml><?xml version="1.0" encoding="utf-8"?>
@@ -9555,7 +9555,7 @@
       </p:sp>
       <p:pic>
         <p:nvPicPr>
-          <p:cNvPr id="10" name="Image 2" descr="Recording studio booths analogy for worktrees and focused context">    </p:cNvPr>
+          <p:cNvPr id="10" name="Image 2" descr="Recording studio booths analogy for worktrees and focused context"/>
           <p:cNvPicPr>
             <a:picLocks noChangeAspect="1"/>
           </p:cNvPicPr>
@@ -10339,7 +10339,7 @@
       </p:sp>
       <p:pic>
         <p:nvPicPr>
-          <p:cNvPr id="10" name="Image 2" descr="One repository with many safe worktrees">    </p:cNvPr>
+          <p:cNvPr id="10" name="Image 2" descr="One repository with many safe worktrees"/>
           <p:cNvPicPr>
             <a:picLocks noChangeAspect="1"/>
           </p:cNvPicPr>
@@ -11165,7 +11165,7 @@
       </p:sp>
       <p:pic>
         <p:nvPicPr>
-          <p:cNvPr id="10" name="Image 2" descr="Where to work menu in the GitHub Copilot app showing New worktree, Current checkout, Cloud, and Base branch">    </p:cNvPr>
+          <p:cNvPr id="10" name="Image 2" descr="Where to work menu in the GitHub Copilot app showing New worktree, Current checkout, Cloud, and Base branch"/>
           <p:cNvPicPr>
             <a:picLocks noChangeAspect="1"/>
           </p:cNvPicPr>

--- a/slides/02-sessions-worktrees-context.pptx
+++ b/slides/02-sessions-worktrees-context.pptx
@@ -2680,7 +2680,7 @@
         </p:nvSpPr>
         <p:spPr>
           <a:xfrm>
-            <a:off x="711101" y="1279773"/>
+            <a:off x="711101" y="1645533"/>
             <a:ext cx="5570169" cy="209550"/>
           </a:xfrm>
           <a:prstGeom prst="rect">
@@ -2719,7 +2719,7 @@
         </p:nvSpPr>
         <p:spPr>
           <a:xfrm>
-            <a:off x="711101" y="1590824"/>
+            <a:off x="711101" y="1956584"/>
             <a:ext cx="5570169" cy="1168301"/>
           </a:xfrm>
           <a:prstGeom prst="rect">
@@ -2764,7 +2764,7 @@
         </p:nvSpPr>
         <p:spPr>
           <a:xfrm>
-            <a:off x="711101" y="2962275"/>
+            <a:off x="711101" y="3328035"/>
             <a:ext cx="609600" cy="63401"/>
           </a:xfrm>
           <a:prstGeom prst="roundRect">
@@ -2785,48 +2785,6 @@
               <a:buNone/>
             </a:pPr>
             <a:endParaRPr lang="en-US" dirty="0"/>
-          </a:p>
-        </p:txBody>
-      </p:sp>
-      <p:sp>
-        <p:nvSpPr>
-          <p:cNvPr id="12" name="Text 8"/>
-          <p:cNvSpPr/>
-          <p:nvPr/>
-        </p:nvSpPr>
-        <p:spPr>
-          <a:xfrm>
-            <a:off x="711101" y="3228826"/>
-            <a:ext cx="5570169" cy="634901"/>
-          </a:xfrm>
-          <a:prstGeom prst="rect">
-            <a:avLst/>
-          </a:prstGeom>
-          <a:noFill/>
-          <a:ln/>
-        </p:spPr>
-        <p:txBody>
-          <a:bodyPr wrap="square" lIns="0" tIns="0" rIns="0" bIns="0" rtlCol="0" anchor="t"/>
-          <a:lstStyle/>
-          <a:p>
-            <a:pPr algn="l" indent="0" marL="0">
-              <a:lnSpc>
-                <a:spcPts val="2500"/>
-              </a:lnSpc>
-              <a:buNone/>
-            </a:pPr>
-            <a:r>
-              <a:rPr lang="en-US" sz="1900" dirty="0">
-                <a:solidFill>
-                  <a:srgbClr val="59636E"/>
-                </a:solidFill>
-                <a:latin typeface="Arial" pitchFamily="34" charset="0"/>
-                <a:ea typeface="Arial" pitchFamily="34" charset="-122"/>
-                <a:cs typeface="Arial" pitchFamily="34" charset="-120"/>
-              </a:rPr>
-              <a:t>Start from a practice branch, attach the issue, plan, then verify the fix.</a:t>
-            </a:r>
-            <a:endParaRPr lang="en-US" sz="1900" dirty="0"/>
           </a:p>
         </p:txBody>
       </p:sp>
@@ -9072,7 +9030,7 @@
         </p:nvSpPr>
         <p:spPr>
           <a:xfrm>
-            <a:off x="711101" y="1279773"/>
+            <a:off x="711101" y="1645533"/>
             <a:ext cx="5570169" cy="209550"/>
           </a:xfrm>
           <a:prstGeom prst="rect">
@@ -9111,7 +9069,7 @@
         </p:nvSpPr>
         <p:spPr>
           <a:xfrm>
-            <a:off x="711101" y="1590824"/>
+            <a:off x="711101" y="1956584"/>
             <a:ext cx="5570169" cy="1168301"/>
           </a:xfrm>
           <a:prstGeom prst="rect">
@@ -9156,7 +9114,7 @@
         </p:nvSpPr>
         <p:spPr>
           <a:xfrm>
-            <a:off x="711101" y="2962275"/>
+            <a:off x="711101" y="3328035"/>
             <a:ext cx="609600" cy="63401"/>
           </a:xfrm>
           <a:prstGeom prst="roundRect">
@@ -9177,48 +9135,6 @@
               <a:buNone/>
             </a:pPr>
             <a:endParaRPr lang="en-US" dirty="0"/>
-          </a:p>
-        </p:txBody>
-      </p:sp>
-      <p:sp>
-        <p:nvSpPr>
-          <p:cNvPr id="12" name="Text 8"/>
-          <p:cNvSpPr/>
-          <p:nvPr/>
-        </p:nvSpPr>
-        <p:spPr>
-          <a:xfrm>
-            <a:off x="711101" y="3228826"/>
-            <a:ext cx="5570169" cy="634901"/>
-          </a:xfrm>
-          <a:prstGeom prst="rect">
-            <a:avLst/>
-          </a:prstGeom>
-          <a:noFill/>
-          <a:ln/>
-        </p:spPr>
-        <p:txBody>
-          <a:bodyPr wrap="square" lIns="0" tIns="0" rIns="0" bIns="0" rtlCol="0" anchor="t"/>
-          <a:lstStyle/>
-          <a:p>
-            <a:pPr algn="l" indent="0" marL="0">
-              <a:lnSpc>
-                <a:spcPts val="2500"/>
-              </a:lnSpc>
-              <a:buNone/>
-            </a:pPr>
-            <a:r>
-              <a:rPr lang="en-US" sz="1900" dirty="0">
-                <a:solidFill>
-                  <a:srgbClr val="59636E"/>
-                </a:solidFill>
-                <a:latin typeface="Arial" pitchFamily="34" charset="0"/>
-                <a:ea typeface="Arial" pitchFamily="34" charset="-122"/>
-                <a:cs typeface="Arial" pitchFamily="34" charset="-120"/>
-              </a:rPr>
-              <a:t>Give every task its own folder and branch, so parallel work never collides.</a:t>
-            </a:r>
-            <a:endParaRPr lang="en-US" sz="1900" dirty="0"/>
           </a:p>
         </p:txBody>
       </p:sp>
@@ -12027,7 +11943,7 @@
         </p:nvSpPr>
         <p:spPr>
           <a:xfrm>
-            <a:off x="711101" y="1279773"/>
+            <a:off x="711101" y="1645533"/>
             <a:ext cx="5570169" cy="209550"/>
           </a:xfrm>
           <a:prstGeom prst="rect">
@@ -12066,7 +11982,7 @@
         </p:nvSpPr>
         <p:spPr>
           <a:xfrm>
-            <a:off x="711101" y="1590824"/>
+            <a:off x="711101" y="1956584"/>
             <a:ext cx="5570169" cy="1168301"/>
           </a:xfrm>
           <a:prstGeom prst="rect">
@@ -12111,7 +12027,7 @@
         </p:nvSpPr>
         <p:spPr>
           <a:xfrm>
-            <a:off x="711101" y="2962275"/>
+            <a:off x="711101" y="3328035"/>
             <a:ext cx="609600" cy="63401"/>
           </a:xfrm>
           <a:prstGeom prst="roundRect">
@@ -12132,48 +12048,6 @@
               <a:buNone/>
             </a:pPr>
             <a:endParaRPr lang="en-US" dirty="0"/>
-          </a:p>
-        </p:txBody>
-      </p:sp>
-      <p:sp>
-        <p:nvSpPr>
-          <p:cNvPr id="12" name="Text 8"/>
-          <p:cNvSpPr/>
-          <p:nvPr/>
-        </p:nvSpPr>
-        <p:spPr>
-          <a:xfrm>
-            <a:off x="711101" y="3228826"/>
-            <a:ext cx="5570169" cy="634901"/>
-          </a:xfrm>
-          <a:prstGeom prst="rect">
-            <a:avLst/>
-          </a:prstGeom>
-          <a:noFill/>
-          <a:ln/>
-        </p:spPr>
-        <p:txBody>
-          <a:bodyPr wrap="square" lIns="0" tIns="0" rIns="0" bIns="0" rtlCol="0" anchor="t"/>
-          <a:lstStyle/>
-          <a:p>
-            <a:pPr algn="l" indent="0" marL="0">
-              <a:lnSpc>
-                <a:spcPts val="2500"/>
-              </a:lnSpc>
-              <a:buNone/>
-            </a:pPr>
-            <a:r>
-              <a:rPr lang="en-US" sz="1900" dirty="0">
-                <a:solidFill>
-                  <a:srgbClr val="59636E"/>
-                </a:solidFill>
-                <a:latin typeface="Arial" pitchFamily="34" charset="0"/>
-                <a:ea typeface="Arial" pitchFamily="34" charset="-122"/>
-                <a:cs typeface="Arial" pitchFamily="34" charset="-120"/>
-              </a:rPr>
-              <a:t>Attach exactly what the task needs. Less is often more.</a:t>
-            </a:r>
-            <a:endParaRPr lang="en-US" sz="1900" dirty="0"/>
           </a:p>
         </p:txBody>
       </p:sp>

--- a/slides/02-sessions-worktrees-context.pptx
+++ b/slides/02-sessions-worktrees-context.pptx
@@ -5157,6 +5157,12 @@
               </ns1:lnSpc>
               <ns1:buNone/>
             </ns1:pPr>
+            <ns1:pPr algn="l" indent="0" marL="0">
+              <ns1:lnSpc>
+                <ns1:spcPts val="1760"/>
+              </ns1:lnSpc>
+              <ns1:buNone/>
+            </ns1:pPr>
             <ns1:r>
               <ns1:rPr lang="en-US" sz="1450" b="1" dirty="0">
                 <ns1:solidFill>
@@ -5166,14 +5172,8 @@
                 <ns1:ea typeface="Courier New" pitchFamily="34" charset="-122"/>
                 <ns1:cs typeface="Courier New" pitchFamily="34" charset="-120"/>
               </ns1:rPr>
-              <ns1:t>/context opens usage details.</ns1:t>
+              <ns1:t>/context</ns1:t>
             </ns1:r>
-            <ns1:pPr algn="l" indent="0" marL="0">
-              <ns1:lnSpc>
-                <ns1:spcPts val="1760"/>
-              </ns1:lnSpc>
-              <ns1:buNone/>
-            </ns1:pPr>
             <ns1:r>
               <ns1:rPr lang="en-US" sz="1450" dirty="0">
                 <ns1:solidFill>
@@ -5183,7 +5183,7 @@
                 <ns1:ea typeface="Arial" pitchFamily="34" charset="-122"/>
                 <ns1:cs typeface="Arial" pitchFamily="34" charset="-120"/>
               </ns1:rPr>
-              <ns1:t/>
+              <ns1:t xml:space="preserve"> opens usage details.</ns1:t>
             </ns1:r>
             <ns1:endParaRPr lang="en-US" sz="1450" dirty="0"/>
           </ns1:p>
@@ -10218,8 +10218,8 @@
         </p:nvSpPr>
         <p:spPr>
           <a:xfrm>
-            <a:off x="511076" y="1831925"/>
-            <a:ext cx="3676650" cy="2482751"/>
+            <a:off x="2194560" y="1527048"/>
+            <a:ext cx="4754880" cy="3200400"/>
           </a:xfrm>
           <a:prstGeom prst="roundRect">
             <a:avLst>
@@ -10269,485 +10269,14 @@
         </p:blipFill>
         <p:spPr>
           <a:xfrm>
-            <a:off x="558701" y="1879550"/>
-            <a:ext cx="3581400" cy="2387501"/>
+            <a:off x="2240280" y="1572768"/>
+            <a:ext cx="4663440" cy="3108960"/>
           </a:xfrm>
           <a:prstGeom prst="rect">
             <a:avLst/>
           </a:prstGeom>
         </p:spPr>
       </p:pic>
-      <p:sp>
-        <p:nvSpPr>
-          <p:cNvPr id="11" name="Text 6"/>
-          <p:cNvSpPr/>
-          <p:nvPr/>
-        </p:nvSpPr>
-        <p:spPr>
-          <a:xfrm>
-            <a:off x="4444752" y="1888778"/>
-            <a:ext cx="4216301" cy="2368897"/>
-          </a:xfrm>
-          <a:prstGeom prst="roundRect">
-            <a:avLst>
-              <a:gd name="adj" fmla="val 4289"/>
-            </a:avLst>
-          </a:prstGeom>
-          <a:solidFill>
-            <a:srgbClr val="FFFFFF"/>
-          </a:solidFill>
-          <a:ln w="9525">
-            <a:solidFill>
-              <a:srgbClr val="D1D9E0"/>
-            </a:solidFill>
-          </a:ln>
-        </p:spPr>
-        <p:txBody>
-          <a:bodyPr wrap="square" rtlCol="0" anchor="ctr"/>
-          <a:lstStyle/>
-          <a:p>
-            <a:pPr indent="0" marL="0">
-              <a:buNone/>
-            </a:pPr>
-            <a:endParaRPr lang="en-US" dirty="0"/>
-          </a:p>
-        </p:txBody>
-      </p:sp>
-      <p:sp>
-        <p:nvSpPr>
-          <p:cNvPr id="12" name="Text 7"/>
-          <p:cNvSpPr/>
-          <p:nvPr/>
-        </p:nvSpPr>
-        <p:spPr>
-          <a:xfrm>
-            <a:off x="4454277" y="1898303"/>
-            <a:ext cx="4197251" cy="326975"/>
-          </a:xfrm>
-          <a:prstGeom prst="rect">
-            <a:avLst/>
-          </a:prstGeom>
-          <a:solidFill>
-            <a:srgbClr val="DDF4FF"/>
-          </a:solidFill>
-          <a:ln/>
-        </p:spPr>
-        <p:txBody>
-          <a:bodyPr wrap="square" rtlCol="0" anchor="ctr"/>
-          <a:lstStyle/>
-          <a:p>
-            <a:pPr indent="0" marL="0">
-              <a:buNone/>
-            </a:pPr>
-            <a:endParaRPr lang="en-US" dirty="0"/>
-          </a:p>
-        </p:txBody>
-      </p:sp>
-      <p:sp>
-        <p:nvSpPr>
-          <p:cNvPr id="13" name="Shape 8"/>
-          <p:cNvSpPr/>
-          <p:nvPr/>
-        </p:nvSpPr>
-        <p:spPr>
-          <a:xfrm>
-            <a:off x="4454277" y="2220516"/>
-            <a:ext cx="4197251" cy="0"/>
-          </a:xfrm>
-          <a:prstGeom prst="line">
-            <a:avLst/>
-          </a:prstGeom>
-          <a:noFill/>
-          <a:ln w="9525">
-            <a:solidFill>
-              <a:srgbClr val="9CD7FF"/>
-            </a:solidFill>
-            <a:prstDash val="solid"/>
-          </a:ln>
-        </p:spPr>
-      </p:sp>
-      <p:sp>
-        <p:nvSpPr>
-          <p:cNvPr id="14" name="Text 9"/>
-          <p:cNvSpPr/>
-          <p:nvPr/>
-        </p:nvSpPr>
-        <p:spPr>
-          <a:xfrm>
-            <a:off x="4606677" y="1974503"/>
-            <a:ext cx="1839417" cy="165050"/>
-          </a:xfrm>
-          <a:prstGeom prst="rect">
-            <a:avLst/>
-          </a:prstGeom>
-          <a:noFill/>
-          <a:ln/>
-        </p:spPr>
-        <p:txBody>
-          <a:bodyPr wrap="square" lIns="0" tIns="0" rIns="0" bIns="0" rtlCol="0" anchor="t"/>
-          <a:lstStyle/>
-          <a:p>
-            <a:pPr algn="l" indent="0" marL="0">
-              <a:lnSpc>
-                <a:spcPts val="1300"/>
-              </a:lnSpc>
-              <a:buNone/>
-            </a:pPr>
-            <a:r>
-              <a:rPr lang="en-US" sz="1150" b="1" dirty="0">
-                <a:solidFill>
-                  <a:srgbClr val="0969DA"/>
-                </a:solidFill>
-                <a:latin typeface="Arial" pitchFamily="34" charset="0"/>
-                <a:ea typeface="Arial" pitchFamily="34" charset="-122"/>
-                <a:cs typeface="Arial" pitchFamily="34" charset="-120"/>
-              </a:rPr>
-              <a:t>WITHOUT ISOLATION</a:t>
-            </a:r>
-            <a:endParaRPr lang="en-US" sz="1150" dirty="0"/>
-          </a:p>
-        </p:txBody>
-      </p:sp>
-      <p:sp>
-        <p:nvSpPr>
-          <p:cNvPr id="15" name="Text 10"/>
-          <p:cNvSpPr/>
-          <p:nvPr/>
-        </p:nvSpPr>
-        <p:spPr>
-          <a:xfrm>
-            <a:off x="6714827" y="1974503"/>
-            <a:ext cx="1839417" cy="165050"/>
-          </a:xfrm>
-          <a:prstGeom prst="rect">
-            <a:avLst/>
-          </a:prstGeom>
-          <a:noFill/>
-          <a:ln/>
-        </p:spPr>
-        <p:txBody>
-          <a:bodyPr wrap="square" lIns="0" tIns="0" rIns="0" bIns="0" rtlCol="0" anchor="t"/>
-          <a:lstStyle/>
-          <a:p>
-            <a:pPr algn="l" indent="0" marL="0">
-              <a:lnSpc>
-                <a:spcPts val="1300"/>
-              </a:lnSpc>
-              <a:buNone/>
-            </a:pPr>
-            <a:r>
-              <a:rPr lang="en-US" sz="1150" b="1" dirty="0">
-                <a:solidFill>
-                  <a:srgbClr val="0969DA"/>
-                </a:solidFill>
-                <a:latin typeface="Arial" pitchFamily="34" charset="0"/>
-                <a:ea typeface="Arial" pitchFamily="34" charset="-122"/>
-                <a:cs typeface="Arial" pitchFamily="34" charset="-120"/>
-              </a:rPr>
-              <a:t>WITH A WORKTREE</a:t>
-            </a:r>
-            <a:endParaRPr lang="en-US" sz="1150" dirty="0"/>
-          </a:p>
-        </p:txBody>
-      </p:sp>
-      <p:sp>
-        <p:nvSpPr>
-          <p:cNvPr id="16" name="Shape 11"/>
-          <p:cNvSpPr/>
-          <p:nvPr/>
-        </p:nvSpPr>
-        <p:spPr>
-          <a:xfrm>
-            <a:off x="4454277" y="2897981"/>
-            <a:ext cx="4197251" cy="0"/>
-          </a:xfrm>
-          <a:prstGeom prst="line">
-            <a:avLst/>
-          </a:prstGeom>
-          <a:noFill/>
-          <a:ln w="9525">
-            <a:solidFill>
-              <a:srgbClr val="D1D9E0"/>
-            </a:solidFill>
-            <a:prstDash val="solid"/>
-          </a:ln>
-        </p:spPr>
-      </p:sp>
-      <p:sp>
-        <p:nvSpPr>
-          <p:cNvPr id="17" name="Text 12"/>
-          <p:cNvSpPr/>
-          <p:nvPr/>
-        </p:nvSpPr>
-        <p:spPr>
-          <a:xfrm>
-            <a:off x="4606677" y="2455664"/>
-            <a:ext cx="1839417" cy="207020"/>
-          </a:xfrm>
-          <a:prstGeom prst="rect">
-            <a:avLst/>
-          </a:prstGeom>
-          <a:noFill/>
-          <a:ln/>
-        </p:spPr>
-        <p:txBody>
-          <a:bodyPr wrap="square" lIns="0" tIns="0" rIns="0" bIns="0" rtlCol="0" anchor="t"/>
-          <a:lstStyle/>
-          <a:p>
-            <a:pPr algn="l" indent="0" marL="0">
-              <a:lnSpc>
-                <a:spcPts val="1630"/>
-              </a:lnSpc>
-              <a:buNone/>
-            </a:pPr>
-            <a:r>
-              <a:rPr lang="en-US" sz="1400" dirty="0">
-                <a:solidFill>
-                  <a:srgbClr val="59636E"/>
-                </a:solidFill>
-                <a:latin typeface="Arial" pitchFamily="34" charset="0"/>
-                <a:ea typeface="Arial" pitchFamily="34" charset="-122"/>
-                <a:cs typeface="Arial" pitchFamily="34" charset="-120"/>
-              </a:rPr>
-              <a:t>Tasks share one folder</a:t>
-            </a:r>
-            <a:endParaRPr lang="en-US" sz="1400" dirty="0"/>
-          </a:p>
-        </p:txBody>
-      </p:sp>
-      <p:sp>
-        <p:nvSpPr>
-          <p:cNvPr id="18" name="Text 13"/>
-          <p:cNvSpPr/>
-          <p:nvPr/>
-        </p:nvSpPr>
-        <p:spPr>
-          <a:xfrm>
-            <a:off x="6714827" y="2352229"/>
-            <a:ext cx="1839417" cy="414040"/>
-          </a:xfrm>
-          <a:prstGeom prst="rect">
-            <a:avLst/>
-          </a:prstGeom>
-          <a:noFill/>
-          <a:ln/>
-        </p:spPr>
-        <p:txBody>
-          <a:bodyPr wrap="square" lIns="0" tIns="0" rIns="0" bIns="0" rtlCol="0" anchor="t"/>
-          <a:lstStyle/>
-          <a:p>
-            <a:pPr algn="l" indent="0" marL="0">
-              <a:lnSpc>
-                <a:spcPts val="1630"/>
-              </a:lnSpc>
-              <a:buNone/>
-            </a:pPr>
-            <a:r>
-              <a:rPr lang="en-US" sz="1400" dirty="0">
-                <a:solidFill>
-                  <a:srgbClr val="1F2328"/>
-                </a:solidFill>
-                <a:latin typeface="Arial" pitchFamily="34" charset="0"/>
-                <a:ea typeface="Arial" pitchFamily="34" charset="-122"/>
-                <a:cs typeface="Arial" pitchFamily="34" charset="-120"/>
-              </a:rPr>
-              <a:t>Each task has its own folder</a:t>
-            </a:r>
-            <a:endParaRPr lang="en-US" sz="1400" dirty="0"/>
-          </a:p>
-        </p:txBody>
-      </p:sp>
-      <p:sp>
-        <p:nvSpPr>
-          <p:cNvPr id="19" name="Shape 14"/>
-          <p:cNvSpPr/>
-          <p:nvPr/>
-        </p:nvSpPr>
-        <p:spPr>
-          <a:xfrm>
-            <a:off x="4454277" y="3575447"/>
-            <a:ext cx="4197251" cy="0"/>
-          </a:xfrm>
-          <a:prstGeom prst="line">
-            <a:avLst/>
-          </a:prstGeom>
-          <a:noFill/>
-          <a:ln w="9525">
-            <a:solidFill>
-              <a:srgbClr val="D1D9E0"/>
-            </a:solidFill>
-            <a:prstDash val="solid"/>
-          </a:ln>
-        </p:spPr>
-      </p:sp>
-      <p:sp>
-        <p:nvSpPr>
-          <p:cNvPr id="20" name="Text 15"/>
-          <p:cNvSpPr/>
-          <p:nvPr/>
-        </p:nvSpPr>
-        <p:spPr>
-          <a:xfrm>
-            <a:off x="4606677" y="3029694"/>
-            <a:ext cx="1839417" cy="414040"/>
-          </a:xfrm>
-          <a:prstGeom prst="rect">
-            <a:avLst/>
-          </a:prstGeom>
-          <a:noFill/>
-          <a:ln/>
-        </p:spPr>
-        <p:txBody>
-          <a:bodyPr wrap="square" lIns="0" tIns="0" rIns="0" bIns="0" rtlCol="0" anchor="t"/>
-          <a:lstStyle/>
-          <a:p>
-            <a:pPr algn="l" indent="0" marL="0">
-              <a:lnSpc>
-                <a:spcPts val="1630"/>
-              </a:lnSpc>
-              <a:buNone/>
-            </a:pPr>
-            <a:r>
-              <a:rPr lang="en-US" sz="1400" dirty="0">
-                <a:solidFill>
-                  <a:srgbClr val="59636E"/>
-                </a:solidFill>
-                <a:latin typeface="Arial" pitchFamily="34" charset="0"/>
-                <a:ea typeface="Arial" pitchFamily="34" charset="-122"/>
-                <a:cs typeface="Arial" pitchFamily="34" charset="-120"/>
-              </a:rPr>
-              <a:t>Branch state is easy to lose</a:t>
-            </a:r>
-            <a:endParaRPr lang="en-US" sz="1400" dirty="0"/>
-          </a:p>
-        </p:txBody>
-      </p:sp>
-      <p:sp>
-        <p:nvSpPr>
-          <p:cNvPr id="21" name="Text 16"/>
-          <p:cNvSpPr/>
-          <p:nvPr/>
-        </p:nvSpPr>
-        <p:spPr>
-          <a:xfrm>
-            <a:off x="6714827" y="3029694"/>
-            <a:ext cx="1839417" cy="414040"/>
-          </a:xfrm>
-          <a:prstGeom prst="rect">
-            <a:avLst/>
-          </a:prstGeom>
-          <a:noFill/>
-          <a:ln/>
-        </p:spPr>
-        <p:txBody>
-          <a:bodyPr wrap="square" lIns="0" tIns="0" rIns="0" bIns="0" rtlCol="0" anchor="t"/>
-          <a:lstStyle/>
-          <a:p>
-            <a:pPr algn="l" indent="0" marL="0">
-              <a:lnSpc>
-                <a:spcPts val="1630"/>
-              </a:lnSpc>
-              <a:buNone/>
-            </a:pPr>
-            <a:r>
-              <a:rPr lang="en-US" sz="1400" dirty="0">
-                <a:solidFill>
-                  <a:srgbClr val="1F2328"/>
-                </a:solidFill>
-                <a:latin typeface="Arial" pitchFamily="34" charset="0"/>
-                <a:ea typeface="Arial" pitchFamily="34" charset="-122"/>
-                <a:cs typeface="Arial" pitchFamily="34" charset="-120"/>
-              </a:rPr>
-              <a:t>The branch shows in the app</a:t>
-            </a:r>
-            <a:endParaRPr lang="en-US" sz="1400" dirty="0"/>
-          </a:p>
-        </p:txBody>
-      </p:sp>
-      <p:sp>
-        <p:nvSpPr>
-          <p:cNvPr id="22" name="Text 17"/>
-          <p:cNvSpPr/>
-          <p:nvPr/>
-        </p:nvSpPr>
-        <p:spPr>
-          <a:xfrm>
-            <a:off x="4606677" y="3810595"/>
-            <a:ext cx="1839417" cy="207020"/>
-          </a:xfrm>
-          <a:prstGeom prst="rect">
-            <a:avLst/>
-          </a:prstGeom>
-          <a:noFill/>
-          <a:ln/>
-        </p:spPr>
-        <p:txBody>
-          <a:bodyPr wrap="square" lIns="0" tIns="0" rIns="0" bIns="0" rtlCol="0" anchor="t"/>
-          <a:lstStyle/>
-          <a:p>
-            <a:pPr algn="l" indent="0" marL="0">
-              <a:lnSpc>
-                <a:spcPts val="1630"/>
-              </a:lnSpc>
-              <a:buNone/>
-            </a:pPr>
-            <a:r>
-              <a:rPr lang="en-US" sz="1400" dirty="0">
-                <a:solidFill>
-                  <a:srgbClr val="59636E"/>
-                </a:solidFill>
-                <a:latin typeface="Arial" pitchFamily="34" charset="0"/>
-                <a:ea typeface="Arial" pitchFamily="34" charset="-122"/>
-                <a:cs typeface="Arial" pitchFamily="34" charset="-120"/>
-              </a:rPr>
-              <a:t>Diffs mix together</a:t>
-            </a:r>
-            <a:endParaRPr lang="en-US" sz="1400" dirty="0"/>
-          </a:p>
-        </p:txBody>
-      </p:sp>
-      <p:sp>
-        <p:nvSpPr>
-          <p:cNvPr id="23" name="Text 18"/>
-          <p:cNvSpPr/>
-          <p:nvPr/>
-        </p:nvSpPr>
-        <p:spPr>
-          <a:xfrm>
-            <a:off x="6714827" y="3707160"/>
-            <a:ext cx="1839417" cy="414040"/>
-          </a:xfrm>
-          <a:prstGeom prst="rect">
-            <a:avLst/>
-          </a:prstGeom>
-          <a:noFill/>
-          <a:ln/>
-        </p:spPr>
-        <p:txBody>
-          <a:bodyPr wrap="square" lIns="0" tIns="0" rIns="0" bIns="0" rtlCol="0" anchor="t"/>
-          <a:lstStyle/>
-          <a:p>
-            <a:pPr algn="l" indent="0" marL="0">
-              <a:lnSpc>
-                <a:spcPts val="1630"/>
-              </a:lnSpc>
-              <a:buNone/>
-            </a:pPr>
-            <a:r>
-              <a:rPr lang="en-US" sz="1400" dirty="0">
-                <a:solidFill>
-                  <a:srgbClr val="1F2328"/>
-                </a:solidFill>
-                <a:latin typeface="Arial" pitchFamily="34" charset="0"/>
-                <a:ea typeface="Arial" pitchFamily="34" charset="-122"/>
-                <a:cs typeface="Arial" pitchFamily="34" charset="-120"/>
-              </a:rPr>
-              <a:t>Diffs stay with the session</a:t>
-            </a:r>
-            <a:endParaRPr lang="en-US" sz="1400" dirty="0"/>
-          </a:p>
-        </p:txBody>
-      </p:sp>
     </p:spTree>
   </p:cSld>
   <p:clrMapOvr>
